--- a/documents/visual_abstract_NER.pptx
+++ b/documents/visual_abstract_NER.pptx
@@ -5,8 +5,13 @@
     <p:sldMasterId id="2147483648" r:id="rId1"/>
   </p:sldMasterIdLst>
   <p:sldIdLst>
-    <p:sldId id="257" r:id="rId2"/>
-    <p:sldId id="256" r:id="rId3"/>
+    <p:sldId id="258" r:id="rId2"/>
+    <p:sldId id="260" r:id="rId3"/>
+    <p:sldId id="261" r:id="rId4"/>
+    <p:sldId id="262" r:id="rId5"/>
+    <p:sldId id="257" r:id="rId6"/>
+    <p:sldId id="256" r:id="rId7"/>
+    <p:sldId id="259" r:id="rId8"/>
   </p:sldIdLst>
   <p:sldSz cx="9144000" cy="6858000" type="screen4x3"/>
   <p:notesSz cx="6858000" cy="9144000"/>
@@ -162,10 +167,9 @@
           <a:lstStyle/>
           <a:p>
             <a:r>
-              <a:rPr lang="en-US" smtClean="0"/>
+              <a:rPr lang="en-US"/>
               <a:t>Click to edit Master title style</a:t>
             </a:r>
-            <a:endParaRPr lang="en-US"/>
           </a:p>
         </p:txBody>
       </p:sp>
@@ -281,10 +285,9 @@
           </a:lstStyle>
           <a:p>
             <a:r>
-              <a:rPr lang="en-US" smtClean="0"/>
+              <a:rPr lang="en-US"/>
               <a:t>Click to edit Master subtitle style</a:t>
             </a:r>
-            <a:endParaRPr lang="en-US"/>
           </a:p>
         </p:txBody>
       </p:sp>
@@ -305,7 +308,7 @@
           <a:p>
             <a:fld id="{5BCAD085-E8A6-8845-BD4E-CB4CCA059FC4}" type="datetimeFigureOut">
               <a:rPr lang="en-US" smtClean="0"/>
-              <a:t>10/2/2025</a:t>
+              <a:t>3/23/2026</a:t>
             </a:fld>
             <a:endParaRPr lang="en-US"/>
           </a:p>
@@ -399,10 +402,9 @@
           <a:lstStyle/>
           <a:p>
             <a:r>
-              <a:rPr lang="en-US" smtClean="0"/>
+              <a:rPr lang="en-US"/>
               <a:t>Click to edit Master title style</a:t>
             </a:r>
-            <a:endParaRPr lang="en-US"/>
           </a:p>
         </p:txBody>
       </p:sp>
@@ -423,38 +425,37 @@
           <a:p>
             <a:pPr lvl="0"/>
             <a:r>
-              <a:rPr lang="en-US" smtClean="0"/>
+              <a:rPr lang="en-US"/>
               <a:t>Click to edit Master text styles</a:t>
             </a:r>
           </a:p>
           <a:p>
             <a:pPr lvl="1"/>
             <a:r>
-              <a:rPr lang="en-US" smtClean="0"/>
+              <a:rPr lang="en-US"/>
               <a:t>Second level</a:t>
             </a:r>
           </a:p>
           <a:p>
             <a:pPr lvl="2"/>
             <a:r>
-              <a:rPr lang="en-US" smtClean="0"/>
+              <a:rPr lang="en-US"/>
               <a:t>Third level</a:t>
             </a:r>
           </a:p>
           <a:p>
             <a:pPr lvl="3"/>
             <a:r>
-              <a:rPr lang="en-US" smtClean="0"/>
+              <a:rPr lang="en-US"/>
               <a:t>Fourth level</a:t>
             </a:r>
           </a:p>
           <a:p>
             <a:pPr lvl="4"/>
             <a:r>
-              <a:rPr lang="en-US" smtClean="0"/>
+              <a:rPr lang="en-US"/>
               <a:t>Fifth level</a:t>
             </a:r>
-            <a:endParaRPr lang="en-US"/>
           </a:p>
         </p:txBody>
       </p:sp>
@@ -475,7 +476,7 @@
           <a:p>
             <a:fld id="{5BCAD085-E8A6-8845-BD4E-CB4CCA059FC4}" type="datetimeFigureOut">
               <a:rPr lang="en-US" smtClean="0"/>
-              <a:t>10/2/2025</a:t>
+              <a:t>3/23/2026</a:t>
             </a:fld>
             <a:endParaRPr lang="en-US"/>
           </a:p>
@@ -574,10 +575,9 @@
           <a:lstStyle/>
           <a:p>
             <a:r>
-              <a:rPr lang="en-US" smtClean="0"/>
+              <a:rPr lang="en-US"/>
               <a:t>Click to edit Master title style</a:t>
             </a:r>
-            <a:endParaRPr lang="en-US"/>
           </a:p>
         </p:txBody>
       </p:sp>
@@ -603,38 +603,37 @@
           <a:p>
             <a:pPr lvl="0"/>
             <a:r>
-              <a:rPr lang="en-US" smtClean="0"/>
+              <a:rPr lang="en-US"/>
               <a:t>Click to edit Master text styles</a:t>
             </a:r>
           </a:p>
           <a:p>
             <a:pPr lvl="1"/>
             <a:r>
-              <a:rPr lang="en-US" smtClean="0"/>
+              <a:rPr lang="en-US"/>
               <a:t>Second level</a:t>
             </a:r>
           </a:p>
           <a:p>
             <a:pPr lvl="2"/>
             <a:r>
-              <a:rPr lang="en-US" smtClean="0"/>
+              <a:rPr lang="en-US"/>
               <a:t>Third level</a:t>
             </a:r>
           </a:p>
           <a:p>
             <a:pPr lvl="3"/>
             <a:r>
-              <a:rPr lang="en-US" smtClean="0"/>
+              <a:rPr lang="en-US"/>
               <a:t>Fourth level</a:t>
             </a:r>
           </a:p>
           <a:p>
             <a:pPr lvl="4"/>
             <a:r>
-              <a:rPr lang="en-US" smtClean="0"/>
+              <a:rPr lang="en-US"/>
               <a:t>Fifth level</a:t>
             </a:r>
-            <a:endParaRPr lang="en-US"/>
           </a:p>
         </p:txBody>
       </p:sp>
@@ -655,7 +654,7 @@
           <a:p>
             <a:fld id="{5BCAD085-E8A6-8845-BD4E-CB4CCA059FC4}" type="datetimeFigureOut">
               <a:rPr lang="en-US" smtClean="0"/>
-              <a:t>10/2/2025</a:t>
+              <a:t>3/23/2026</a:t>
             </a:fld>
             <a:endParaRPr lang="en-US"/>
           </a:p>
@@ -749,10 +748,9 @@
           <a:lstStyle/>
           <a:p>
             <a:r>
-              <a:rPr lang="en-US" smtClean="0"/>
+              <a:rPr lang="en-US"/>
               <a:t>Click to edit Master title style</a:t>
             </a:r>
-            <a:endParaRPr lang="en-US"/>
           </a:p>
         </p:txBody>
       </p:sp>
@@ -773,38 +771,37 @@
           <a:p>
             <a:pPr lvl="0"/>
             <a:r>
-              <a:rPr lang="en-US" smtClean="0"/>
+              <a:rPr lang="en-US"/>
               <a:t>Click to edit Master text styles</a:t>
             </a:r>
           </a:p>
           <a:p>
             <a:pPr lvl="1"/>
             <a:r>
-              <a:rPr lang="en-US" smtClean="0"/>
+              <a:rPr lang="en-US"/>
               <a:t>Second level</a:t>
             </a:r>
           </a:p>
           <a:p>
             <a:pPr lvl="2"/>
             <a:r>
-              <a:rPr lang="en-US" smtClean="0"/>
+              <a:rPr lang="en-US"/>
               <a:t>Third level</a:t>
             </a:r>
           </a:p>
           <a:p>
             <a:pPr lvl="3"/>
             <a:r>
-              <a:rPr lang="en-US" smtClean="0"/>
+              <a:rPr lang="en-US"/>
               <a:t>Fourth level</a:t>
             </a:r>
           </a:p>
           <a:p>
             <a:pPr lvl="4"/>
             <a:r>
-              <a:rPr lang="en-US" smtClean="0"/>
+              <a:rPr lang="en-US"/>
               <a:t>Fifth level</a:t>
             </a:r>
-            <a:endParaRPr lang="en-US"/>
           </a:p>
         </p:txBody>
       </p:sp>
@@ -825,7 +822,7 @@
           <a:p>
             <a:fld id="{5BCAD085-E8A6-8845-BD4E-CB4CCA059FC4}" type="datetimeFigureOut">
               <a:rPr lang="en-US" smtClean="0"/>
-              <a:t>10/2/2025</a:t>
+              <a:t>3/23/2026</a:t>
             </a:fld>
             <a:endParaRPr lang="en-US"/>
           </a:p>
@@ -928,10 +925,9 @@
           </a:lstStyle>
           <a:p>
             <a:r>
-              <a:rPr lang="en-US" smtClean="0"/>
+              <a:rPr lang="en-US"/>
               <a:t>Click to edit Master title style</a:t>
             </a:r>
-            <a:endParaRPr lang="en-US"/>
           </a:p>
         </p:txBody>
       </p:sp>
@@ -1048,7 +1044,7 @@
           <a:p>
             <a:pPr lvl="0"/>
             <a:r>
-              <a:rPr lang="en-US" smtClean="0"/>
+              <a:rPr lang="en-US"/>
               <a:t>Click to edit Master text styles</a:t>
             </a:r>
           </a:p>
@@ -1071,7 +1067,7 @@
           <a:p>
             <a:fld id="{5BCAD085-E8A6-8845-BD4E-CB4CCA059FC4}" type="datetimeFigureOut">
               <a:rPr lang="en-US" smtClean="0"/>
-              <a:t>10/2/2025</a:t>
+              <a:t>3/23/2026</a:t>
             </a:fld>
             <a:endParaRPr lang="en-US"/>
           </a:p>
@@ -1165,10 +1161,9 @@
           <a:lstStyle/>
           <a:p>
             <a:r>
-              <a:rPr lang="en-US" smtClean="0"/>
+              <a:rPr lang="en-US"/>
               <a:t>Click to edit Master title style</a:t>
             </a:r>
-            <a:endParaRPr lang="en-US"/>
           </a:p>
         </p:txBody>
       </p:sp>
@@ -1222,38 +1217,37 @@
           <a:p>
             <a:pPr lvl="0"/>
             <a:r>
-              <a:rPr lang="en-US" smtClean="0"/>
+              <a:rPr lang="en-US"/>
               <a:t>Click to edit Master text styles</a:t>
             </a:r>
           </a:p>
           <a:p>
             <a:pPr lvl="1"/>
             <a:r>
-              <a:rPr lang="en-US" smtClean="0"/>
+              <a:rPr lang="en-US"/>
               <a:t>Second level</a:t>
             </a:r>
           </a:p>
           <a:p>
             <a:pPr lvl="2"/>
             <a:r>
-              <a:rPr lang="en-US" smtClean="0"/>
+              <a:rPr lang="en-US"/>
               <a:t>Third level</a:t>
             </a:r>
           </a:p>
           <a:p>
             <a:pPr lvl="3"/>
             <a:r>
-              <a:rPr lang="en-US" smtClean="0"/>
+              <a:rPr lang="en-US"/>
               <a:t>Fourth level</a:t>
             </a:r>
           </a:p>
           <a:p>
             <a:pPr lvl="4"/>
             <a:r>
-              <a:rPr lang="en-US" smtClean="0"/>
+              <a:rPr lang="en-US"/>
               <a:t>Fifth level</a:t>
             </a:r>
-            <a:endParaRPr lang="en-US"/>
           </a:p>
         </p:txBody>
       </p:sp>
@@ -1307,38 +1301,37 @@
           <a:p>
             <a:pPr lvl="0"/>
             <a:r>
-              <a:rPr lang="en-US" smtClean="0"/>
+              <a:rPr lang="en-US"/>
               <a:t>Click to edit Master text styles</a:t>
             </a:r>
           </a:p>
           <a:p>
             <a:pPr lvl="1"/>
             <a:r>
-              <a:rPr lang="en-US" smtClean="0"/>
+              <a:rPr lang="en-US"/>
               <a:t>Second level</a:t>
             </a:r>
           </a:p>
           <a:p>
             <a:pPr lvl="2"/>
             <a:r>
-              <a:rPr lang="en-US" smtClean="0"/>
+              <a:rPr lang="en-US"/>
               <a:t>Third level</a:t>
             </a:r>
           </a:p>
           <a:p>
             <a:pPr lvl="3"/>
             <a:r>
-              <a:rPr lang="en-US" smtClean="0"/>
+              <a:rPr lang="en-US"/>
               <a:t>Fourth level</a:t>
             </a:r>
           </a:p>
           <a:p>
             <a:pPr lvl="4"/>
             <a:r>
-              <a:rPr lang="en-US" smtClean="0"/>
+              <a:rPr lang="en-US"/>
               <a:t>Fifth level</a:t>
             </a:r>
-            <a:endParaRPr lang="en-US"/>
           </a:p>
         </p:txBody>
       </p:sp>
@@ -1359,7 +1352,7 @@
           <a:p>
             <a:fld id="{5BCAD085-E8A6-8845-BD4E-CB4CCA059FC4}" type="datetimeFigureOut">
               <a:rPr lang="en-US" smtClean="0"/>
-              <a:t>10/2/2025</a:t>
+              <a:t>3/23/2026</a:t>
             </a:fld>
             <a:endParaRPr lang="en-US"/>
           </a:p>
@@ -1457,10 +1450,9 @@
           </a:lstStyle>
           <a:p>
             <a:r>
-              <a:rPr lang="en-US" smtClean="0"/>
+              <a:rPr lang="en-US"/>
               <a:t>Click to edit Master title style</a:t>
             </a:r>
-            <a:endParaRPr lang="en-US"/>
           </a:p>
         </p:txBody>
       </p:sp>
@@ -1523,7 +1515,7 @@
           <a:p>
             <a:pPr lvl="0"/>
             <a:r>
-              <a:rPr lang="en-US" smtClean="0"/>
+              <a:rPr lang="en-US"/>
               <a:t>Click to edit Master text styles</a:t>
             </a:r>
           </a:p>
@@ -1579,38 +1571,37 @@
           <a:p>
             <a:pPr lvl="0"/>
             <a:r>
-              <a:rPr lang="en-US" smtClean="0"/>
+              <a:rPr lang="en-US"/>
               <a:t>Click to edit Master text styles</a:t>
             </a:r>
           </a:p>
           <a:p>
             <a:pPr lvl="1"/>
             <a:r>
-              <a:rPr lang="en-US" smtClean="0"/>
+              <a:rPr lang="en-US"/>
               <a:t>Second level</a:t>
             </a:r>
           </a:p>
           <a:p>
             <a:pPr lvl="2"/>
             <a:r>
-              <a:rPr lang="en-US" smtClean="0"/>
+              <a:rPr lang="en-US"/>
               <a:t>Third level</a:t>
             </a:r>
           </a:p>
           <a:p>
             <a:pPr lvl="3"/>
             <a:r>
-              <a:rPr lang="en-US" smtClean="0"/>
+              <a:rPr lang="en-US"/>
               <a:t>Fourth level</a:t>
             </a:r>
           </a:p>
           <a:p>
             <a:pPr lvl="4"/>
             <a:r>
-              <a:rPr lang="en-US" smtClean="0"/>
+              <a:rPr lang="en-US"/>
               <a:t>Fifth level</a:t>
             </a:r>
-            <a:endParaRPr lang="en-US"/>
           </a:p>
         </p:txBody>
       </p:sp>
@@ -1673,7 +1664,7 @@
           <a:p>
             <a:pPr lvl="0"/>
             <a:r>
-              <a:rPr lang="en-US" smtClean="0"/>
+              <a:rPr lang="en-US"/>
               <a:t>Click to edit Master text styles</a:t>
             </a:r>
           </a:p>
@@ -1729,38 +1720,37 @@
           <a:p>
             <a:pPr lvl="0"/>
             <a:r>
-              <a:rPr lang="en-US" smtClean="0"/>
+              <a:rPr lang="en-US"/>
               <a:t>Click to edit Master text styles</a:t>
             </a:r>
           </a:p>
           <a:p>
             <a:pPr lvl="1"/>
             <a:r>
-              <a:rPr lang="en-US" smtClean="0"/>
+              <a:rPr lang="en-US"/>
               <a:t>Second level</a:t>
             </a:r>
           </a:p>
           <a:p>
             <a:pPr lvl="2"/>
             <a:r>
-              <a:rPr lang="en-US" smtClean="0"/>
+              <a:rPr lang="en-US"/>
               <a:t>Third level</a:t>
             </a:r>
           </a:p>
           <a:p>
             <a:pPr lvl="3"/>
             <a:r>
-              <a:rPr lang="en-US" smtClean="0"/>
+              <a:rPr lang="en-US"/>
               <a:t>Fourth level</a:t>
             </a:r>
           </a:p>
           <a:p>
             <a:pPr lvl="4"/>
             <a:r>
-              <a:rPr lang="en-US" smtClean="0"/>
+              <a:rPr lang="en-US"/>
               <a:t>Fifth level</a:t>
             </a:r>
-            <a:endParaRPr lang="en-US"/>
           </a:p>
         </p:txBody>
       </p:sp>
@@ -1781,7 +1771,7 @@
           <a:p>
             <a:fld id="{5BCAD085-E8A6-8845-BD4E-CB4CCA059FC4}" type="datetimeFigureOut">
               <a:rPr lang="en-US" smtClean="0"/>
-              <a:t>10/2/2025</a:t>
+              <a:t>3/23/2026</a:t>
             </a:fld>
             <a:endParaRPr lang="en-US"/>
           </a:p>
@@ -1875,10 +1865,9 @@
           <a:lstStyle/>
           <a:p>
             <a:r>
-              <a:rPr lang="en-US" smtClean="0"/>
+              <a:rPr lang="en-US"/>
               <a:t>Click to edit Master title style</a:t>
             </a:r>
-            <a:endParaRPr lang="en-US"/>
           </a:p>
         </p:txBody>
       </p:sp>
@@ -1899,7 +1888,7 @@
           <a:p>
             <a:fld id="{5BCAD085-E8A6-8845-BD4E-CB4CCA059FC4}" type="datetimeFigureOut">
               <a:rPr lang="en-US" smtClean="0"/>
-              <a:t>10/2/2025</a:t>
+              <a:t>3/23/2026</a:t>
             </a:fld>
             <a:endParaRPr lang="en-US"/>
           </a:p>
@@ -1994,7 +1983,7 @@
           <a:p>
             <a:fld id="{5BCAD085-E8A6-8845-BD4E-CB4CCA059FC4}" type="datetimeFigureOut">
               <a:rPr lang="en-US" smtClean="0"/>
-              <a:t>10/2/2025</a:t>
+              <a:t>3/23/2026</a:t>
             </a:fld>
             <a:endParaRPr lang="en-US"/>
           </a:p>
@@ -2097,10 +2086,9 @@
           </a:lstStyle>
           <a:p>
             <a:r>
-              <a:rPr lang="en-US" smtClean="0"/>
+              <a:rPr lang="en-US"/>
               <a:t>Click to edit Master title style</a:t>
             </a:r>
-            <a:endParaRPr lang="en-US"/>
           </a:p>
         </p:txBody>
       </p:sp>
@@ -2154,38 +2142,37 @@
           <a:p>
             <a:pPr lvl="0"/>
             <a:r>
-              <a:rPr lang="en-US" smtClean="0"/>
+              <a:rPr lang="en-US"/>
               <a:t>Click to edit Master text styles</a:t>
             </a:r>
           </a:p>
           <a:p>
             <a:pPr lvl="1"/>
             <a:r>
-              <a:rPr lang="en-US" smtClean="0"/>
+              <a:rPr lang="en-US"/>
               <a:t>Second level</a:t>
             </a:r>
           </a:p>
           <a:p>
             <a:pPr lvl="2"/>
             <a:r>
-              <a:rPr lang="en-US" smtClean="0"/>
+              <a:rPr lang="en-US"/>
               <a:t>Third level</a:t>
             </a:r>
           </a:p>
           <a:p>
             <a:pPr lvl="3"/>
             <a:r>
-              <a:rPr lang="en-US" smtClean="0"/>
+              <a:rPr lang="en-US"/>
               <a:t>Fourth level</a:t>
             </a:r>
           </a:p>
           <a:p>
             <a:pPr lvl="4"/>
             <a:r>
-              <a:rPr lang="en-US" smtClean="0"/>
+              <a:rPr lang="en-US"/>
               <a:t>Fifth level</a:t>
             </a:r>
-            <a:endParaRPr lang="en-US"/>
           </a:p>
         </p:txBody>
       </p:sp>
@@ -2248,7 +2235,7 @@
           <a:p>
             <a:pPr lvl="0"/>
             <a:r>
-              <a:rPr lang="en-US" smtClean="0"/>
+              <a:rPr lang="en-US"/>
               <a:t>Click to edit Master text styles</a:t>
             </a:r>
           </a:p>
@@ -2271,7 +2258,7 @@
           <a:p>
             <a:fld id="{5BCAD085-E8A6-8845-BD4E-CB4CCA059FC4}" type="datetimeFigureOut">
               <a:rPr lang="en-US" smtClean="0"/>
-              <a:t>10/2/2025</a:t>
+              <a:t>3/23/2026</a:t>
             </a:fld>
             <a:endParaRPr lang="en-US"/>
           </a:p>
@@ -2374,10 +2361,9 @@
           </a:lstStyle>
           <a:p>
             <a:r>
-              <a:rPr lang="en-US" smtClean="0"/>
+              <a:rPr lang="en-US"/>
               <a:t>Click to edit Master title style</a:t>
             </a:r>
-            <a:endParaRPr lang="en-US"/>
           </a:p>
         </p:txBody>
       </p:sp>
@@ -2501,7 +2487,7 @@
           <a:p>
             <a:pPr lvl="0"/>
             <a:r>
-              <a:rPr lang="en-US" smtClean="0"/>
+              <a:rPr lang="en-US"/>
               <a:t>Click to edit Master text styles</a:t>
             </a:r>
           </a:p>
@@ -2524,7 +2510,7 @@
           <a:p>
             <a:fld id="{5BCAD085-E8A6-8845-BD4E-CB4CCA059FC4}" type="datetimeFigureOut">
               <a:rPr lang="en-US" smtClean="0"/>
-              <a:t>10/2/2025</a:t>
+              <a:t>3/23/2026</a:t>
             </a:fld>
             <a:endParaRPr lang="en-US"/>
           </a:p>
@@ -2633,10 +2619,9 @@
           <a:lstStyle/>
           <a:p>
             <a:r>
-              <a:rPr lang="en-US" smtClean="0"/>
+              <a:rPr lang="en-US"/>
               <a:t>Click to edit Master title style</a:t>
             </a:r>
-            <a:endParaRPr lang="en-US"/>
           </a:p>
         </p:txBody>
       </p:sp>
@@ -2667,38 +2652,37 @@
           <a:p>
             <a:pPr lvl="0"/>
             <a:r>
-              <a:rPr lang="en-US" smtClean="0"/>
+              <a:rPr lang="en-US"/>
               <a:t>Click to edit Master text styles</a:t>
             </a:r>
           </a:p>
           <a:p>
             <a:pPr lvl="1"/>
             <a:r>
-              <a:rPr lang="en-US" smtClean="0"/>
+              <a:rPr lang="en-US"/>
               <a:t>Second level</a:t>
             </a:r>
           </a:p>
           <a:p>
             <a:pPr lvl="2"/>
             <a:r>
-              <a:rPr lang="en-US" smtClean="0"/>
+              <a:rPr lang="en-US"/>
               <a:t>Third level</a:t>
             </a:r>
           </a:p>
           <a:p>
             <a:pPr lvl="3"/>
             <a:r>
-              <a:rPr lang="en-US" smtClean="0"/>
+              <a:rPr lang="en-US"/>
               <a:t>Fourth level</a:t>
             </a:r>
           </a:p>
           <a:p>
             <a:pPr lvl="4"/>
             <a:r>
-              <a:rPr lang="en-US" smtClean="0"/>
+              <a:rPr lang="en-US"/>
               <a:t>Fifth level</a:t>
             </a:r>
-            <a:endParaRPr lang="en-US"/>
           </a:p>
         </p:txBody>
       </p:sp>
@@ -2737,7 +2721,7 @@
           <a:p>
             <a:fld id="{5BCAD085-E8A6-8845-BD4E-CB4CCA059FC4}" type="datetimeFigureOut">
               <a:rPr lang="en-US" smtClean="0"/>
-              <a:t>10/2/2025</a:t>
+              <a:t>3/23/2026</a:t>
             </a:fld>
             <a:endParaRPr lang="en-US"/>
           </a:p>
@@ -3114,6 +3098,664 @@
       </p:grpSpPr>
       <p:sp>
         <p:nvSpPr>
+          <p:cNvPr id="4" name="Textfeld 3">
+            <a:extLst>
+              <a:ext uri="{FF2B5EF4-FFF2-40B4-BE49-F238E27FC236}">
+                <a16:creationId xmlns:a16="http://schemas.microsoft.com/office/drawing/2014/main" id="{F739AACA-63AE-29FC-D28F-81F2CC7362FD}"/>
+              </a:ext>
+            </a:extLst>
+          </p:cNvPr>
+          <p:cNvSpPr txBox="1"/>
+          <p:nvPr/>
+        </p:nvSpPr>
+        <p:spPr>
+          <a:xfrm>
+            <a:off x="316992" y="3528316"/>
+            <a:ext cx="8180832" cy="1200329"/>
+          </a:xfrm>
+          <a:prstGeom prst="rect">
+            <a:avLst/>
+          </a:prstGeom>
+          <a:noFill/>
+        </p:spPr>
+        <p:txBody>
+          <a:bodyPr wrap="square">
+            <a:spAutoFit/>
+          </a:bodyPr>
+          <a:lstStyle/>
+          <a:p>
+            <a:r>
+              <a:rPr lang="de-DE" b="1" dirty="0"/>
+              <a:t>MEXEGER</a:t>
+            </a:r>
+            <a:r>
+              <a:rPr lang="de-DE" dirty="0"/>
+              <a:t> </a:t>
+            </a:r>
+            <a:r>
+              <a:rPr lang="de-DE" dirty="0" err="1"/>
+              <a:t>serves</a:t>
+            </a:r>
+            <a:r>
+              <a:rPr lang="de-DE" dirty="0"/>
+              <a:t> </a:t>
+            </a:r>
+            <a:r>
+              <a:rPr lang="de-DE" dirty="0" err="1"/>
+              <a:t>as</a:t>
+            </a:r>
+            <a:r>
+              <a:rPr lang="de-DE" dirty="0"/>
+              <a:t> a high-</a:t>
+            </a:r>
+            <a:r>
+              <a:rPr lang="de-DE" dirty="0" err="1"/>
+              <a:t>precision</a:t>
+            </a:r>
+            <a:r>
+              <a:rPr lang="de-DE" dirty="0"/>
+              <a:t> </a:t>
+            </a:r>
+            <a:r>
+              <a:rPr lang="de-DE" dirty="0" err="1"/>
+              <a:t>bridge</a:t>
+            </a:r>
+            <a:r>
+              <a:rPr lang="de-DE" dirty="0"/>
+              <a:t> </a:t>
+            </a:r>
+            <a:r>
+              <a:rPr lang="de-DE" dirty="0" err="1"/>
+              <a:t>between</a:t>
+            </a:r>
+            <a:r>
+              <a:rPr lang="de-DE" dirty="0"/>
+              <a:t> </a:t>
+            </a:r>
+            <a:r>
+              <a:rPr lang="de-DE" dirty="0" err="1"/>
+              <a:t>unstructured</a:t>
+            </a:r>
+            <a:r>
+              <a:rPr lang="de-DE" dirty="0"/>
+              <a:t> </a:t>
+            </a:r>
+            <a:r>
+              <a:rPr lang="de-DE" dirty="0" err="1"/>
+              <a:t>clinical</a:t>
+            </a:r>
+            <a:r>
+              <a:rPr lang="de-DE" dirty="0"/>
+              <a:t> narratives and </a:t>
+            </a:r>
+            <a:r>
+              <a:rPr lang="de-DE" dirty="0" err="1"/>
+              <a:t>structured</a:t>
+            </a:r>
+            <a:r>
+              <a:rPr lang="de-DE" dirty="0"/>
+              <a:t>, </a:t>
+            </a:r>
+            <a:r>
+              <a:rPr lang="de-DE" dirty="0" err="1"/>
+              <a:t>actionable</a:t>
+            </a:r>
+            <a:r>
+              <a:rPr lang="de-DE" dirty="0"/>
+              <a:t> </a:t>
+            </a:r>
+            <a:r>
+              <a:rPr lang="de-DE" dirty="0" err="1"/>
+              <a:t>data</a:t>
+            </a:r>
+            <a:r>
+              <a:rPr lang="de-DE" dirty="0"/>
+              <a:t>. By </a:t>
+            </a:r>
+            <a:r>
+              <a:rPr lang="de-DE" dirty="0" err="1"/>
+              <a:t>leveraging</a:t>
+            </a:r>
+            <a:r>
+              <a:rPr lang="de-DE" dirty="0"/>
+              <a:t> a </a:t>
+            </a:r>
+            <a:r>
+              <a:rPr lang="de-DE" dirty="0" err="1"/>
+              <a:t>fine-tuned</a:t>
+            </a:r>
+            <a:r>
+              <a:rPr lang="de-DE" dirty="0"/>
+              <a:t> GBERT </a:t>
+            </a:r>
+            <a:r>
+              <a:rPr lang="de-DE" dirty="0" err="1"/>
+              <a:t>architecture</a:t>
+            </a:r>
+            <a:r>
+              <a:rPr lang="de-DE" dirty="0"/>
+              <a:t>, </a:t>
+            </a:r>
+            <a:r>
+              <a:rPr lang="de-DE" dirty="0" err="1"/>
+              <a:t>it</a:t>
+            </a:r>
+            <a:r>
+              <a:rPr lang="de-DE" dirty="0"/>
+              <a:t> </a:t>
+            </a:r>
+            <a:r>
+              <a:rPr lang="de-DE" dirty="0" err="1"/>
+              <a:t>transforms</a:t>
+            </a:r>
+            <a:r>
+              <a:rPr lang="de-DE" dirty="0"/>
+              <a:t> </a:t>
+            </a:r>
+            <a:r>
+              <a:rPr lang="de-DE" dirty="0" err="1"/>
+              <a:t>raw</a:t>
+            </a:r>
+            <a:r>
+              <a:rPr lang="de-DE" dirty="0"/>
+              <a:t> German </a:t>
+            </a:r>
+            <a:r>
+              <a:rPr lang="de-DE" dirty="0" err="1"/>
+              <a:t>medical</a:t>
+            </a:r>
+            <a:r>
+              <a:rPr lang="de-DE" dirty="0"/>
+              <a:t> </a:t>
+            </a:r>
+            <a:r>
+              <a:rPr lang="de-DE" dirty="0" err="1"/>
+              <a:t>text</a:t>
+            </a:r>
+            <a:r>
+              <a:rPr lang="de-DE" dirty="0"/>
+              <a:t> </a:t>
+            </a:r>
+            <a:r>
+              <a:rPr lang="de-DE" dirty="0" err="1"/>
+              <a:t>into</a:t>
+            </a:r>
+            <a:r>
+              <a:rPr lang="de-DE" dirty="0"/>
+              <a:t> </a:t>
+            </a:r>
+            <a:r>
+              <a:rPr lang="de-DE" dirty="0" err="1"/>
+              <a:t>standardized</a:t>
+            </a:r>
+            <a:r>
+              <a:rPr lang="de-DE" dirty="0"/>
+              <a:t>, interoperable </a:t>
+            </a:r>
+            <a:r>
+              <a:rPr lang="de-DE" dirty="0" err="1"/>
+              <a:t>assets</a:t>
+            </a:r>
+            <a:r>
+              <a:rPr lang="de-DE" dirty="0"/>
+              <a:t> (ICD-10, SNOMED CT, FHIR).</a:t>
+            </a:r>
+            <a:endParaRPr lang="en-US" dirty="0"/>
+          </a:p>
+        </p:txBody>
+      </p:sp>
+      <p:pic>
+        <p:nvPicPr>
+          <p:cNvPr id="8" name="Grafik 7">
+            <a:extLst>
+              <a:ext uri="{FF2B5EF4-FFF2-40B4-BE49-F238E27FC236}">
+                <a16:creationId xmlns:a16="http://schemas.microsoft.com/office/drawing/2014/main" id="{60C520C7-4D84-8449-0658-E9D8518326CC}"/>
+              </a:ext>
+            </a:extLst>
+          </p:cNvPr>
+          <p:cNvPicPr>
+            <a:picLocks noChangeAspect="1"/>
+          </p:cNvPicPr>
+          <p:nvPr/>
+        </p:nvPicPr>
+        <p:blipFill>
+          <a:blip r:embed="rId2"/>
+          <a:stretch>
+            <a:fillRect/>
+          </a:stretch>
+        </p:blipFill>
+        <p:spPr>
+          <a:xfrm>
+            <a:off x="2343060" y="235741"/>
+            <a:ext cx="4128696" cy="3193259"/>
+          </a:xfrm>
+          <a:prstGeom prst="rect">
+            <a:avLst/>
+          </a:prstGeom>
+        </p:spPr>
+      </p:pic>
+    </p:spTree>
+    <p:extLst>
+      <p:ext uri="{BB962C8B-B14F-4D97-AF65-F5344CB8AC3E}">
+        <p14:creationId xmlns:p14="http://schemas.microsoft.com/office/powerpoint/2010/main" val="3729091746"/>
+      </p:ext>
+    </p:extLst>
+  </p:cSld>
+  <p:clrMapOvr>
+    <a:masterClrMapping/>
+  </p:clrMapOvr>
+</p:sld>
+</file>
+
+<file path=ppt/slides/slide2.xml><?xml version="1.0" encoding="utf-8"?>
+<p:sld xmlns:a="http://schemas.openxmlformats.org/drawingml/2006/main" xmlns:r="http://schemas.openxmlformats.org/officeDocument/2006/relationships" xmlns:p="http://schemas.openxmlformats.org/presentationml/2006/main">
+  <p:cSld>
+    <p:spTree>
+      <p:nvGrpSpPr>
+        <p:cNvPr id="1" name=""/>
+        <p:cNvGrpSpPr/>
+        <p:nvPr/>
+      </p:nvGrpSpPr>
+      <p:grpSpPr>
+        <a:xfrm>
+          <a:off x="0" y="0"/>
+          <a:ext cx="0" cy="0"/>
+          <a:chOff x="0" y="0"/>
+          <a:chExt cx="0" cy="0"/>
+        </a:xfrm>
+      </p:grpSpPr>
+      <p:sp>
+        <p:nvSpPr>
+          <p:cNvPr id="2" name="Titel 1">
+            <a:extLst>
+              <a:ext uri="{FF2B5EF4-FFF2-40B4-BE49-F238E27FC236}">
+                <a16:creationId xmlns:a16="http://schemas.microsoft.com/office/drawing/2014/main" id="{6CCE6DB3-BD7D-F72A-91BF-2753CC41C882}"/>
+              </a:ext>
+            </a:extLst>
+          </p:cNvPr>
+          <p:cNvSpPr>
+            <a:spLocks noGrp="1"/>
+          </p:cNvSpPr>
+          <p:nvPr>
+            <p:ph type="title"/>
+          </p:nvPr>
+        </p:nvSpPr>
+        <p:spPr>
+          <a:xfrm>
+            <a:off x="0" y="-122650"/>
+            <a:ext cx="8229600" cy="1143000"/>
+          </a:xfrm>
+        </p:spPr>
+        <p:txBody>
+          <a:bodyPr/>
+          <a:lstStyle/>
+          <a:p>
+            <a:r>
+              <a:rPr lang="de-DE" dirty="0" err="1"/>
+              <a:t>How</a:t>
+            </a:r>
+            <a:r>
+              <a:rPr lang="de-DE" dirty="0"/>
+              <a:t> </a:t>
+            </a:r>
+            <a:r>
+              <a:rPr lang="de-DE" dirty="0" err="1"/>
+              <a:t>does</a:t>
+            </a:r>
+            <a:r>
+              <a:rPr lang="de-DE" dirty="0"/>
+              <a:t> </a:t>
+            </a:r>
+            <a:r>
+              <a:rPr lang="de-DE" dirty="0" err="1"/>
+              <a:t>it</a:t>
+            </a:r>
+            <a:r>
+              <a:rPr lang="de-DE" dirty="0"/>
+              <a:t> </a:t>
+            </a:r>
+            <a:r>
+              <a:rPr lang="de-DE" dirty="0" err="1"/>
+              <a:t>work</a:t>
+            </a:r>
+            <a:r>
+              <a:rPr lang="de-DE" dirty="0"/>
+              <a:t>?</a:t>
+            </a:r>
+          </a:p>
+        </p:txBody>
+      </p:sp>
+      <p:sp>
+        <p:nvSpPr>
+          <p:cNvPr id="3" name="Textfeld 2">
+            <a:extLst>
+              <a:ext uri="{FF2B5EF4-FFF2-40B4-BE49-F238E27FC236}">
+                <a16:creationId xmlns:a16="http://schemas.microsoft.com/office/drawing/2014/main" id="{1186A368-13BD-7246-7573-90657281A16B}"/>
+              </a:ext>
+            </a:extLst>
+          </p:cNvPr>
+          <p:cNvSpPr txBox="1"/>
+          <p:nvPr/>
+        </p:nvSpPr>
+        <p:spPr>
+          <a:xfrm>
+            <a:off x="5903818" y="855758"/>
+            <a:ext cx="3240182" cy="523220"/>
+          </a:xfrm>
+          <a:prstGeom prst="rect">
+            <a:avLst/>
+          </a:prstGeom>
+          <a:noFill/>
+        </p:spPr>
+        <p:txBody>
+          <a:bodyPr wrap="none" rtlCol="0">
+            <a:spAutoFit/>
+          </a:bodyPr>
+          <a:lstStyle/>
+          <a:p>
+            <a:r>
+              <a:rPr lang="en-US" sz="1400" b="0" i="0" dirty="0">
+                <a:effectLst/>
+                <a:latin typeface="+mj-lt"/>
+              </a:rPr>
+              <a:t>In our project we have used </a:t>
+            </a:r>
+            <a:r>
+              <a:rPr lang="en-US" sz="1400" b="1" i="0" dirty="0">
+                <a:effectLst/>
+                <a:latin typeface="+mj-lt"/>
+              </a:rPr>
+              <a:t>Hugging-Face</a:t>
+            </a:r>
+          </a:p>
+          <a:p>
+            <a:r>
+              <a:rPr lang="en-US" sz="1400" b="0" i="0" dirty="0">
+                <a:effectLst/>
+                <a:latin typeface="+mj-lt"/>
+              </a:rPr>
+              <a:t> with </a:t>
+            </a:r>
+            <a:r>
+              <a:rPr lang="en-US" sz="1400" b="1" i="0" dirty="0" err="1">
+                <a:effectLst/>
+                <a:latin typeface="+mj-lt"/>
+              </a:rPr>
+              <a:t>gbert</a:t>
+            </a:r>
+            <a:r>
+              <a:rPr lang="en-US" sz="1400" b="1" i="0" dirty="0">
+                <a:effectLst/>
+                <a:latin typeface="+mj-lt"/>
+              </a:rPr>
+              <a:t>-base</a:t>
+            </a:r>
+            <a:r>
+              <a:rPr lang="en-US" sz="1400" b="0" i="0" dirty="0">
+                <a:effectLst/>
+                <a:latin typeface="+mj-lt"/>
+              </a:rPr>
+              <a:t> for German language..</a:t>
+            </a:r>
+            <a:endParaRPr lang="de-DE" sz="1400" dirty="0">
+              <a:latin typeface="+mj-lt"/>
+            </a:endParaRPr>
+          </a:p>
+        </p:txBody>
+      </p:sp>
+      <p:pic>
+        <p:nvPicPr>
+          <p:cNvPr id="5" name="Grafik 4">
+            <a:extLst>
+              <a:ext uri="{FF2B5EF4-FFF2-40B4-BE49-F238E27FC236}">
+                <a16:creationId xmlns:a16="http://schemas.microsoft.com/office/drawing/2014/main" id="{688FB5AF-7636-BD68-1B76-00A8F1A398DA}"/>
+              </a:ext>
+            </a:extLst>
+          </p:cNvPr>
+          <p:cNvPicPr>
+            <a:picLocks noChangeAspect="1"/>
+          </p:cNvPicPr>
+          <p:nvPr/>
+        </p:nvPicPr>
+        <p:blipFill>
+          <a:blip r:embed="rId2"/>
+          <a:stretch>
+            <a:fillRect/>
+          </a:stretch>
+        </p:blipFill>
+        <p:spPr>
+          <a:xfrm>
+            <a:off x="145194" y="859536"/>
+            <a:ext cx="5355238" cy="5998464"/>
+          </a:xfrm>
+          <a:prstGeom prst="rect">
+            <a:avLst/>
+          </a:prstGeom>
+        </p:spPr>
+      </p:pic>
+    </p:spTree>
+    <p:extLst>
+      <p:ext uri="{BB962C8B-B14F-4D97-AF65-F5344CB8AC3E}">
+        <p14:creationId xmlns:p14="http://schemas.microsoft.com/office/powerpoint/2010/main" val="415844600"/>
+      </p:ext>
+    </p:extLst>
+  </p:cSld>
+  <p:clrMapOvr>
+    <a:masterClrMapping/>
+  </p:clrMapOvr>
+</p:sld>
+</file>
+
+<file path=ppt/slides/slide3.xml><?xml version="1.0" encoding="utf-8"?>
+<p:sld xmlns:a="http://schemas.openxmlformats.org/drawingml/2006/main" xmlns:r="http://schemas.openxmlformats.org/officeDocument/2006/relationships" xmlns:p="http://schemas.openxmlformats.org/presentationml/2006/main">
+  <p:cSld>
+    <p:spTree>
+      <p:nvGrpSpPr>
+        <p:cNvPr id="1" name=""/>
+        <p:cNvGrpSpPr/>
+        <p:nvPr/>
+      </p:nvGrpSpPr>
+      <p:grpSpPr>
+        <a:xfrm>
+          <a:off x="0" y="0"/>
+          <a:ext cx="0" cy="0"/>
+          <a:chOff x="0" y="0"/>
+          <a:chExt cx="0" cy="0"/>
+        </a:xfrm>
+      </p:grpSpPr>
+      <p:sp>
+        <p:nvSpPr>
+          <p:cNvPr id="2" name="Titel 1">
+            <a:extLst>
+              <a:ext uri="{FF2B5EF4-FFF2-40B4-BE49-F238E27FC236}">
+                <a16:creationId xmlns:a16="http://schemas.microsoft.com/office/drawing/2014/main" id="{72C8E0E1-3533-07A4-988C-221DEE20DB6D}"/>
+              </a:ext>
+            </a:extLst>
+          </p:cNvPr>
+          <p:cNvSpPr>
+            <a:spLocks noGrp="1"/>
+          </p:cNvSpPr>
+          <p:nvPr>
+            <p:ph type="title"/>
+          </p:nvPr>
+        </p:nvSpPr>
+        <p:spPr>
+          <a:xfrm>
+            <a:off x="0" y="0"/>
+            <a:ext cx="8229600" cy="1143000"/>
+          </a:xfrm>
+        </p:spPr>
+        <p:txBody>
+          <a:bodyPr/>
+          <a:lstStyle/>
+          <a:p>
+            <a:r>
+              <a:rPr lang="de-DE" dirty="0"/>
+              <a:t>Trainings </a:t>
+            </a:r>
+            <a:r>
+              <a:rPr lang="de-DE" dirty="0" err="1"/>
+              <a:t>data</a:t>
+            </a:r>
+            <a:endParaRPr lang="de-DE" dirty="0"/>
+          </a:p>
+        </p:txBody>
+      </p:sp>
+      <p:pic>
+        <p:nvPicPr>
+          <p:cNvPr id="4" name="Grafik 3">
+            <a:extLst>
+              <a:ext uri="{FF2B5EF4-FFF2-40B4-BE49-F238E27FC236}">
+                <a16:creationId xmlns:a16="http://schemas.microsoft.com/office/drawing/2014/main" id="{6BCF85F2-96D7-31E5-4F92-CCA1001E0306}"/>
+              </a:ext>
+            </a:extLst>
+          </p:cNvPr>
+          <p:cNvPicPr>
+            <a:picLocks noChangeAspect="1"/>
+          </p:cNvPicPr>
+          <p:nvPr/>
+        </p:nvPicPr>
+        <p:blipFill>
+          <a:blip r:embed="rId2"/>
+          <a:stretch>
+            <a:fillRect/>
+          </a:stretch>
+        </p:blipFill>
+        <p:spPr>
+          <a:xfrm>
+            <a:off x="172057" y="1282209"/>
+            <a:ext cx="7678222" cy="3391373"/>
+          </a:xfrm>
+          <a:prstGeom prst="rect">
+            <a:avLst/>
+          </a:prstGeom>
+        </p:spPr>
+      </p:pic>
+    </p:spTree>
+    <p:extLst>
+      <p:ext uri="{BB962C8B-B14F-4D97-AF65-F5344CB8AC3E}">
+        <p14:creationId xmlns:p14="http://schemas.microsoft.com/office/powerpoint/2010/main" val="1009487393"/>
+      </p:ext>
+    </p:extLst>
+  </p:cSld>
+  <p:clrMapOvr>
+    <a:masterClrMapping/>
+  </p:clrMapOvr>
+</p:sld>
+</file>
+
+<file path=ppt/slides/slide4.xml><?xml version="1.0" encoding="utf-8"?>
+<p:sld xmlns:a="http://schemas.openxmlformats.org/drawingml/2006/main" xmlns:r="http://schemas.openxmlformats.org/officeDocument/2006/relationships" xmlns:p="http://schemas.openxmlformats.org/presentationml/2006/main">
+  <p:cSld>
+    <p:spTree>
+      <p:nvGrpSpPr>
+        <p:cNvPr id="1" name=""/>
+        <p:cNvGrpSpPr/>
+        <p:nvPr/>
+      </p:nvGrpSpPr>
+      <p:grpSpPr>
+        <a:xfrm>
+          <a:off x="0" y="0"/>
+          <a:ext cx="0" cy="0"/>
+          <a:chOff x="0" y="0"/>
+          <a:chExt cx="0" cy="0"/>
+        </a:xfrm>
+      </p:grpSpPr>
+      <p:sp>
+        <p:nvSpPr>
+          <p:cNvPr id="2" name="Titel 1">
+            <a:extLst>
+              <a:ext uri="{FF2B5EF4-FFF2-40B4-BE49-F238E27FC236}">
+                <a16:creationId xmlns:a16="http://schemas.microsoft.com/office/drawing/2014/main" id="{EB72E194-66AB-7E75-4AA9-596FD6A5594D}"/>
+              </a:ext>
+            </a:extLst>
+          </p:cNvPr>
+          <p:cNvSpPr>
+            <a:spLocks noGrp="1"/>
+          </p:cNvSpPr>
+          <p:nvPr>
+            <p:ph type="title"/>
+          </p:nvPr>
+        </p:nvSpPr>
+        <p:spPr>
+          <a:xfrm>
+            <a:off x="0" y="6414"/>
+            <a:ext cx="8229600" cy="1143000"/>
+          </a:xfrm>
+        </p:spPr>
+        <p:txBody>
+          <a:bodyPr/>
+          <a:lstStyle/>
+          <a:p>
+            <a:r>
+              <a:rPr lang="de-DE" dirty="0"/>
+              <a:t>INFERENCE</a:t>
+            </a:r>
+          </a:p>
+        </p:txBody>
+      </p:sp>
+      <p:pic>
+        <p:nvPicPr>
+          <p:cNvPr id="4" name="Grafik 3">
+            <a:extLst>
+              <a:ext uri="{FF2B5EF4-FFF2-40B4-BE49-F238E27FC236}">
+                <a16:creationId xmlns:a16="http://schemas.microsoft.com/office/drawing/2014/main" id="{D99CB502-6235-B6D6-7A62-FE3C6EACF8EC}"/>
+              </a:ext>
+            </a:extLst>
+          </p:cNvPr>
+          <p:cNvPicPr>
+            <a:picLocks noChangeAspect="1"/>
+          </p:cNvPicPr>
+          <p:nvPr/>
+        </p:nvPicPr>
+        <p:blipFill>
+          <a:blip r:embed="rId2"/>
+          <a:stretch>
+            <a:fillRect/>
+          </a:stretch>
+        </p:blipFill>
+        <p:spPr>
+          <a:xfrm>
+            <a:off x="362858" y="917765"/>
+            <a:ext cx="4579782" cy="6177979"/>
+          </a:xfrm>
+          <a:prstGeom prst="rect">
+            <a:avLst/>
+          </a:prstGeom>
+        </p:spPr>
+      </p:pic>
+    </p:spTree>
+    <p:extLst>
+      <p:ext uri="{BB962C8B-B14F-4D97-AF65-F5344CB8AC3E}">
+        <p14:creationId xmlns:p14="http://schemas.microsoft.com/office/powerpoint/2010/main" val="2601901878"/>
+      </p:ext>
+    </p:extLst>
+  </p:cSld>
+  <p:clrMapOvr>
+    <a:masterClrMapping/>
+  </p:clrMapOvr>
+</p:sld>
+</file>
+
+<file path=ppt/slides/slide5.xml><?xml version="1.0" encoding="utf-8"?>
+<p:sld xmlns:a="http://schemas.openxmlformats.org/drawingml/2006/main" xmlns:r="http://schemas.openxmlformats.org/officeDocument/2006/relationships" xmlns:p="http://schemas.openxmlformats.org/presentationml/2006/main">
+  <p:cSld>
+    <p:spTree>
+      <p:nvGrpSpPr>
+        <p:cNvPr id="1" name=""/>
+        <p:cNvGrpSpPr/>
+        <p:nvPr/>
+      </p:nvGrpSpPr>
+      <p:grpSpPr>
+        <a:xfrm>
+          <a:off x="0" y="0"/>
+          <a:ext cx="0" cy="0"/>
+          <a:chOff x="0" y="0"/>
+          <a:chExt cx="0" cy="0"/>
+        </a:xfrm>
+      </p:grpSpPr>
+      <p:sp>
+        <p:nvSpPr>
           <p:cNvPr id="3" name="Title 1"/>
           <p:cNvSpPr>
             <a:spLocks noGrp="1"/>
@@ -3138,92 +3780,12 @@
               <a:defRPr sz="3200" b="1"/>
             </a:pPr>
             <a:r>
-              <a:rPr lang="de-DE" sz="2800" dirty="0" smtClean="0">
-                <a:solidFill>
-                  <a:srgbClr val="063A5A"/>
-                </a:solidFill>
-              </a:rPr>
-              <a:t>Clinical Data </a:t>
-            </a:r>
-            <a:r>
-              <a:rPr lang="de-DE" sz="2800" dirty="0" err="1" smtClean="0">
-                <a:solidFill>
-                  <a:srgbClr val="063A5A"/>
-                </a:solidFill>
-              </a:rPr>
-              <a:t>Extraction</a:t>
-            </a:r>
-            <a:r>
-              <a:rPr lang="de-DE" sz="2800" dirty="0" smtClean="0">
-                <a:solidFill>
-                  <a:srgbClr val="063A5A"/>
-                </a:solidFill>
-              </a:rPr>
-              <a:t> </a:t>
-            </a:r>
-            <a:r>
-              <a:rPr lang="de-DE" sz="2800" dirty="0" err="1" smtClean="0">
-                <a:solidFill>
-                  <a:srgbClr val="063A5A"/>
-                </a:solidFill>
-              </a:rPr>
-              <a:t>from</a:t>
-            </a:r>
-            <a:r>
-              <a:rPr lang="de-DE" sz="2800" dirty="0" smtClean="0">
-                <a:solidFill>
-                  <a:srgbClr val="063A5A"/>
-                </a:solidFill>
-              </a:rPr>
-              <a:t> Medical Reports </a:t>
-            </a:r>
-            <a:r>
-              <a:rPr lang="de-DE" sz="2800" dirty="0" err="1" smtClean="0">
-                <a:solidFill>
-                  <a:srgbClr val="063A5A"/>
-                </a:solidFill>
-              </a:rPr>
-              <a:t>using</a:t>
-            </a:r>
-            <a:r>
-              <a:rPr lang="de-DE" sz="2800" dirty="0" smtClean="0">
-                <a:solidFill>
-                  <a:srgbClr val="063A5A"/>
-                </a:solidFill>
-              </a:rPr>
-              <a:t> GBERT-</a:t>
-            </a:r>
-            <a:r>
-              <a:rPr lang="de-DE" sz="2800" dirty="0" err="1" smtClean="0">
-                <a:solidFill>
-                  <a:srgbClr val="063A5A"/>
-                </a:solidFill>
-              </a:rPr>
-              <a:t>based</a:t>
-            </a:r>
-            <a:r>
-              <a:rPr lang="de-DE" sz="2800" dirty="0" smtClean="0">
-                <a:solidFill>
-                  <a:srgbClr val="063A5A"/>
-                </a:solidFill>
-              </a:rPr>
-              <a:t> </a:t>
-            </a:r>
-            <a:r>
-              <a:rPr lang="de-DE" sz="2800" dirty="0" err="1" smtClean="0">
-                <a:solidFill>
-                  <a:srgbClr val="063A5A"/>
-                </a:solidFill>
-              </a:rPr>
-              <a:t>Named</a:t>
-            </a:r>
-            <a:r>
-              <a:rPr lang="de-DE" sz="2800" dirty="0" smtClean="0">
-                <a:solidFill>
-                  <a:srgbClr val="063A5A"/>
-                </a:solidFill>
-              </a:rPr>
-              <a:t> Entity Recognition</a:t>
+              <a:rPr lang="de-DE" sz="2800" dirty="0">
+                <a:solidFill>
+                  <a:srgbClr val="063A5A"/>
+                </a:solidFill>
+              </a:rPr>
+              <a:t>MEXGER WORKFLOW</a:t>
             </a:r>
             <a:endParaRPr sz="2800" dirty="0">
               <a:solidFill>
@@ -3256,7 +3818,7 @@
           <a:lstStyle/>
           <a:p>
             <a:r>
-              <a:rPr lang="de-DE" sz="2000" b="1" dirty="0" smtClean="0">
+              <a:rPr lang="de-DE" sz="2000" b="1" dirty="0">
                 <a:solidFill>
                   <a:srgbClr val="063A5A"/>
                 </a:solidFill>
@@ -3294,18 +3856,13 @@
           <a:lstStyle/>
           <a:p>
             <a:r>
-              <a:rPr lang="de-DE" sz="2000" b="1" dirty="0" smtClean="0">
+              <a:rPr lang="de-DE" sz="2000" b="1" dirty="0">
                 <a:solidFill>
                   <a:srgbClr val="063A5A"/>
                 </a:solidFill>
               </a:rPr>
               <a:t>METHOD &amp; MODEL</a:t>
             </a:r>
-            <a:endParaRPr lang="de-DE" sz="2000" b="1" dirty="0">
-              <a:solidFill>
-                <a:srgbClr val="063A5A"/>
-              </a:solidFill>
-            </a:endParaRPr>
           </a:p>
         </p:txBody>
       </p:sp>
@@ -3404,18 +3961,13 @@
           <a:lstStyle/>
           <a:p>
             <a:r>
-              <a:rPr lang="de-DE" sz="2000" b="1" dirty="0" smtClean="0">
+              <a:rPr lang="de-DE" sz="2000" b="1" dirty="0">
                 <a:solidFill>
                   <a:srgbClr val="063A5A"/>
                 </a:solidFill>
               </a:rPr>
               <a:t>FUTURE WORKS</a:t>
             </a:r>
-            <a:endParaRPr lang="de-DE" sz="2000" b="1" dirty="0">
-              <a:solidFill>
-                <a:srgbClr val="063A5A"/>
-              </a:solidFill>
-            </a:endParaRPr>
           </a:p>
         </p:txBody>
       </p:sp>
@@ -3442,7 +3994,7 @@
           <a:lstStyle/>
           <a:p>
             <a:r>
-              <a:rPr lang="de-DE" sz="1200" dirty="0" err="1" smtClean="0">
+              <a:rPr lang="de-DE" sz="1200" dirty="0" err="1">
                 <a:solidFill>
                   <a:srgbClr val="063A5A"/>
                 </a:solidFill>
@@ -3450,7 +4002,7 @@
               <a:t>Extract</a:t>
             </a:r>
             <a:r>
-              <a:rPr lang="de-DE" sz="1200" dirty="0" smtClean="0">
+              <a:rPr lang="de-DE" sz="1200" dirty="0">
                 <a:solidFill>
                   <a:srgbClr val="063A5A"/>
                 </a:solidFill>
@@ -3458,7 +4010,7 @@
               <a:t> </a:t>
             </a:r>
             <a:r>
-              <a:rPr lang="de-DE" sz="1200" dirty="0" err="1" smtClean="0">
+              <a:rPr lang="de-DE" sz="1200" dirty="0" err="1">
                 <a:solidFill>
                   <a:srgbClr val="063A5A"/>
                 </a:solidFill>
@@ -3466,7 +4018,7 @@
               <a:t>structured</a:t>
             </a:r>
             <a:r>
-              <a:rPr lang="de-DE" sz="1200" dirty="0" smtClean="0">
+              <a:rPr lang="de-DE" sz="1200" dirty="0">
                 <a:solidFill>
                   <a:srgbClr val="063A5A"/>
                 </a:solidFill>
@@ -3474,7 +4026,7 @@
               <a:t> </a:t>
             </a:r>
             <a:r>
-              <a:rPr lang="de-DE" sz="1200" dirty="0" err="1" smtClean="0">
+              <a:rPr lang="de-DE" sz="1200" dirty="0" err="1">
                 <a:solidFill>
                   <a:srgbClr val="063A5A"/>
                 </a:solidFill>
@@ -3482,7 +4034,7 @@
               <a:t>data</a:t>
             </a:r>
             <a:r>
-              <a:rPr lang="de-DE" sz="1200" dirty="0" smtClean="0">
+              <a:rPr lang="de-DE" sz="1200" dirty="0">
                 <a:solidFill>
                   <a:srgbClr val="063A5A"/>
                 </a:solidFill>
@@ -3492,7 +4044,7 @@
           </a:p>
           <a:p>
             <a:r>
-              <a:rPr lang="de-DE" sz="1200" dirty="0" err="1" smtClean="0">
+              <a:rPr lang="de-DE" sz="1200" dirty="0" err="1">
                 <a:solidFill>
                   <a:srgbClr val="063A5A"/>
                 </a:solidFill>
@@ -3500,7 +4052,7 @@
               <a:t>diagnoses</a:t>
             </a:r>
             <a:r>
-              <a:rPr lang="de-DE" sz="1200" dirty="0" smtClean="0">
+              <a:rPr lang="de-DE" sz="1200" dirty="0">
                 <a:solidFill>
                   <a:srgbClr val="063A5A"/>
                 </a:solidFill>
@@ -3508,7 +4060,7 @@
               <a:t>, </a:t>
             </a:r>
             <a:r>
-              <a:rPr lang="de-DE" sz="1200" dirty="0" err="1" smtClean="0">
+              <a:rPr lang="de-DE" sz="1200" dirty="0" err="1">
                 <a:solidFill>
                   <a:srgbClr val="063A5A"/>
                 </a:solidFill>
@@ -3516,7 +4068,7 @@
               <a:t>Medications</a:t>
             </a:r>
             <a:r>
-              <a:rPr lang="de-DE" sz="1200" dirty="0" smtClean="0">
+              <a:rPr lang="de-DE" sz="1200" dirty="0">
                 <a:solidFill>
                   <a:srgbClr val="063A5A"/>
                 </a:solidFill>
@@ -3524,7 +4076,7 @@
               <a:t>, </a:t>
             </a:r>
             <a:r>
-              <a:rPr lang="de-DE" sz="1200" dirty="0" err="1" smtClean="0">
+              <a:rPr lang="de-DE" sz="1200" dirty="0" err="1">
                 <a:solidFill>
                   <a:srgbClr val="063A5A"/>
                 </a:solidFill>
@@ -3532,18 +4084,13 @@
               <a:t>dates</a:t>
             </a:r>
             <a:r>
-              <a:rPr lang="de-DE" sz="1200" dirty="0" smtClean="0">
+              <a:rPr lang="de-DE" sz="1200" dirty="0">
                 <a:solidFill>
                   <a:srgbClr val="063A5A"/>
                 </a:solidFill>
               </a:rPr>
               <a:t>)</a:t>
             </a:r>
-            <a:endParaRPr lang="de-DE" sz="1200" dirty="0" smtClean="0">
-              <a:solidFill>
-                <a:srgbClr val="063A5A"/>
-              </a:solidFill>
-            </a:endParaRPr>
           </a:p>
           <a:p>
             <a:r>
@@ -3552,18 +4099,10 @@
                   <a:srgbClr val="063A5A"/>
                 </a:solidFill>
               </a:rPr>
-              <a:t>f</a:t>
-            </a:r>
-            <a:r>
-              <a:rPr lang="de-DE" sz="1200" dirty="0" err="1" smtClean="0">
-                <a:solidFill>
-                  <a:srgbClr val="063A5A"/>
-                </a:solidFill>
-              </a:rPr>
-              <a:t>rom</a:t>
-            </a:r>
-            <a:r>
-              <a:rPr lang="de-DE" sz="1200" dirty="0" smtClean="0">
+              <a:t>from</a:t>
+            </a:r>
+            <a:r>
+              <a:rPr lang="de-DE" sz="1200" dirty="0">
                 <a:solidFill>
                   <a:srgbClr val="063A5A"/>
                 </a:solidFill>
@@ -3571,7 +4110,7 @@
               <a:t> </a:t>
             </a:r>
             <a:r>
-              <a:rPr lang="de-DE" sz="1200" dirty="0" err="1" smtClean="0">
+              <a:rPr lang="de-DE" sz="1200" dirty="0" err="1">
                 <a:solidFill>
                   <a:srgbClr val="063A5A"/>
                 </a:solidFill>
@@ -3579,7 +4118,7 @@
               <a:t>unstructured</a:t>
             </a:r>
             <a:r>
-              <a:rPr lang="de-DE" sz="1200" dirty="0" smtClean="0">
+              <a:rPr lang="de-DE" sz="1200" dirty="0">
                 <a:solidFill>
                   <a:srgbClr val="063A5A"/>
                 </a:solidFill>
@@ -3587,23 +4126,15 @@
               <a:t> </a:t>
             </a:r>
             <a:r>
-              <a:rPr lang="de-DE" sz="1200" dirty="0" err="1" smtClean="0">
-                <a:solidFill>
-                  <a:srgbClr val="063A5A"/>
-                </a:solidFill>
-              </a:rPr>
-              <a:t>g</a:t>
-            </a:r>
-            <a:r>
-              <a:rPr lang="de-DE" sz="1200" dirty="0" err="1" smtClean="0">
-                <a:solidFill>
-                  <a:srgbClr val="063A5A"/>
-                </a:solidFill>
-              </a:rPr>
-              <a:t>erman</a:t>
-            </a:r>
-            <a:r>
-              <a:rPr lang="de-DE" sz="1200" dirty="0" smtClean="0">
+              <a:rPr lang="de-DE" sz="1200" dirty="0" err="1">
+                <a:solidFill>
+                  <a:srgbClr val="063A5A"/>
+                </a:solidFill>
+              </a:rPr>
+              <a:t>german</a:t>
+            </a:r>
+            <a:r>
+              <a:rPr lang="de-DE" sz="1200" dirty="0">
                 <a:solidFill>
                   <a:srgbClr val="063A5A"/>
                 </a:solidFill>
@@ -3613,7 +4144,7 @@
           </a:p>
           <a:p>
             <a:r>
-              <a:rPr lang="de-DE" sz="1200" dirty="0" err="1" smtClean="0">
+              <a:rPr lang="de-DE" sz="1200" dirty="0" err="1">
                 <a:solidFill>
                   <a:srgbClr val="063A5A"/>
                 </a:solidFill>
@@ -3621,7 +4152,7 @@
               <a:t>clinical</a:t>
             </a:r>
             <a:r>
-              <a:rPr lang="de-DE" sz="1200" dirty="0" smtClean="0">
+              <a:rPr lang="de-DE" sz="1200" dirty="0">
                 <a:solidFill>
                   <a:srgbClr val="063A5A"/>
                 </a:solidFill>
@@ -3629,7 +4160,7 @@
               <a:t> </a:t>
             </a:r>
             <a:r>
-              <a:rPr lang="de-DE" sz="1200" dirty="0" err="1" smtClean="0">
+              <a:rPr lang="de-DE" sz="1200" dirty="0" err="1">
                 <a:solidFill>
                   <a:srgbClr val="063A5A"/>
                 </a:solidFill>
@@ -3667,7 +4198,7 @@
           <a:lstStyle/>
           <a:p>
             <a:r>
-              <a:rPr lang="de-DE" sz="1200" dirty="0" smtClean="0">
+              <a:rPr lang="de-DE" sz="1200" dirty="0">
                 <a:solidFill>
                   <a:srgbClr val="063A5A"/>
                 </a:solidFill>
@@ -3675,7 +4206,7 @@
               <a:t>Input: Clinical </a:t>
             </a:r>
             <a:r>
-              <a:rPr lang="de-DE" sz="1200" dirty="0" err="1" smtClean="0">
+              <a:rPr lang="de-DE" sz="1200" dirty="0" err="1">
                 <a:solidFill>
                   <a:srgbClr val="063A5A"/>
                 </a:solidFill>
@@ -3683,7 +4214,7 @@
               <a:t>text</a:t>
             </a:r>
             <a:r>
-              <a:rPr lang="de-DE" sz="1200" dirty="0" smtClean="0">
+              <a:rPr lang="de-DE" sz="1200" dirty="0">
                 <a:solidFill>
                   <a:srgbClr val="063A5A"/>
                 </a:solidFill>
@@ -3691,7 +4222,7 @@
               <a:t> (PDF, DOCX, </a:t>
             </a:r>
             <a:r>
-              <a:rPr lang="de-DE" sz="1200" dirty="0" err="1" smtClean="0">
+              <a:rPr lang="de-DE" sz="1200" dirty="0" err="1">
                 <a:solidFill>
                   <a:srgbClr val="063A5A"/>
                 </a:solidFill>
@@ -3699,7 +4230,7 @@
               <a:t>image</a:t>
             </a:r>
             <a:r>
-              <a:rPr lang="de-DE" sz="1200" dirty="0" smtClean="0">
+              <a:rPr lang="de-DE" sz="1200" dirty="0">
                 <a:solidFill>
                   <a:srgbClr val="063A5A"/>
                 </a:solidFill>
@@ -3707,7 +4238,7 @@
               <a:t>, </a:t>
             </a:r>
             <a:r>
-              <a:rPr lang="de-DE" sz="1200" dirty="0" err="1" smtClean="0">
+              <a:rPr lang="de-DE" sz="1200" dirty="0" err="1">
                 <a:solidFill>
                   <a:srgbClr val="063A5A"/>
                 </a:solidFill>
@@ -3715,7 +4246,7 @@
               <a:t>plain</a:t>
             </a:r>
             <a:r>
-              <a:rPr lang="de-DE" sz="1200" dirty="0" smtClean="0">
+              <a:rPr lang="de-DE" sz="1200" dirty="0">
                 <a:solidFill>
                   <a:srgbClr val="063A5A"/>
                 </a:solidFill>
@@ -3723,7 +4254,7 @@
               <a:t> </a:t>
             </a:r>
             <a:r>
-              <a:rPr lang="de-DE" sz="1200" dirty="0" err="1" smtClean="0">
+              <a:rPr lang="de-DE" sz="1200" dirty="0" err="1">
                 <a:solidFill>
                   <a:srgbClr val="063A5A"/>
                 </a:solidFill>
@@ -3731,14 +4262,106 @@
               <a:t>text</a:t>
             </a:r>
             <a:r>
-              <a:rPr lang="de-DE" sz="1200" dirty="0" smtClean="0">
+              <a:rPr lang="de-DE" sz="1200" dirty="0">
                 <a:solidFill>
                   <a:srgbClr val="063A5A"/>
                 </a:solidFill>
               </a:rPr>
               <a:t>)</a:t>
             </a:r>
-            <a:endParaRPr lang="de-DE" sz="1200" dirty="0" smtClean="0">
+          </a:p>
+          <a:p>
+            <a:r>
+              <a:rPr lang="de-DE" sz="1200" dirty="0">
+                <a:solidFill>
+                  <a:srgbClr val="063A5A"/>
+                </a:solidFill>
+              </a:rPr>
+              <a:t>OCR &amp; </a:t>
+            </a:r>
+            <a:r>
+              <a:rPr lang="de-DE" sz="1200" dirty="0" err="1">
+                <a:solidFill>
+                  <a:srgbClr val="063A5A"/>
+                </a:solidFill>
+              </a:rPr>
+              <a:t>preprocessing</a:t>
+            </a:r>
+            <a:r>
+              <a:rPr lang="de-DE" sz="1200" dirty="0">
+                <a:solidFill>
+                  <a:srgbClr val="063A5A"/>
+                </a:solidFill>
+              </a:rPr>
+              <a:t> </a:t>
+            </a:r>
+          </a:p>
+          <a:p>
+            <a:r>
+              <a:rPr lang="de-DE" sz="1200" dirty="0">
+                <a:solidFill>
+                  <a:srgbClr val="063A5A"/>
+                </a:solidFill>
+              </a:rPr>
+              <a:t>GBERT </a:t>
+            </a:r>
+            <a:r>
+              <a:rPr lang="de-DE" sz="1200" dirty="0" err="1">
+                <a:solidFill>
+                  <a:srgbClr val="063A5A"/>
+                </a:solidFill>
+              </a:rPr>
+              <a:t>model</a:t>
+            </a:r>
+            <a:r>
+              <a:rPr lang="de-DE" sz="1200" dirty="0">
+                <a:solidFill>
+                  <a:srgbClr val="063A5A"/>
+                </a:solidFill>
+              </a:rPr>
+              <a:t> </a:t>
+            </a:r>
+            <a:r>
+              <a:rPr lang="de-DE" sz="1200" dirty="0" err="1">
+                <a:solidFill>
+                  <a:srgbClr val="063A5A"/>
+                </a:solidFill>
+              </a:rPr>
+              <a:t>for</a:t>
+            </a:r>
+            <a:r>
+              <a:rPr lang="de-DE" sz="1200" dirty="0">
+                <a:solidFill>
+                  <a:srgbClr val="063A5A"/>
+                </a:solidFill>
+              </a:rPr>
+              <a:t> NER </a:t>
+            </a:r>
+            <a:r>
+              <a:rPr lang="de-DE" sz="1200" dirty="0" err="1">
+                <a:solidFill>
+                  <a:srgbClr val="063A5A"/>
+                </a:solidFill>
+              </a:rPr>
+              <a:t>token</a:t>
+            </a:r>
+            <a:r>
+              <a:rPr lang="de-DE" sz="1200" dirty="0">
+                <a:solidFill>
+                  <a:srgbClr val="063A5A"/>
+                </a:solidFill>
+              </a:rPr>
+              <a:t> </a:t>
+            </a:r>
+            <a:r>
+              <a:rPr lang="de-DE" sz="1200" dirty="0" err="1">
+                <a:solidFill>
+                  <a:srgbClr val="063A5A"/>
+                </a:solidFill>
+              </a:rPr>
+              <a:t>level</a:t>
+            </a:r>
+            <a:endParaRPr lang="de-DE" sz="1200" dirty="0">
               <a:solidFill>
                 <a:srgbClr val="063A5A"/>
               </a:solidFill>
@@ -3746,49 +4369,39 @@
           </a:p>
           <a:p>
             <a:r>
-              <a:rPr lang="de-DE" sz="1200" dirty="0" smtClean="0">
-                <a:solidFill>
-                  <a:srgbClr val="063A5A"/>
-                </a:solidFill>
-              </a:rPr>
-              <a:t>OCR &amp; </a:t>
-            </a:r>
-            <a:r>
-              <a:rPr lang="de-DE" sz="1200" dirty="0" err="1" smtClean="0">
-                <a:solidFill>
-                  <a:srgbClr val="063A5A"/>
-                </a:solidFill>
-              </a:rPr>
-              <a:t>preprocessing</a:t>
-            </a:r>
-            <a:r>
-              <a:rPr lang="de-DE" sz="1200" dirty="0" smtClean="0">
+              <a:rPr lang="de-DE" sz="1200" dirty="0">
+                <a:solidFill>
+                  <a:srgbClr val="063A5A"/>
+                </a:solidFill>
+              </a:rPr>
+              <a:t>Post-</a:t>
+            </a:r>
+            <a:r>
+              <a:rPr lang="de-DE" sz="1200" dirty="0" err="1">
+                <a:solidFill>
+                  <a:srgbClr val="063A5A"/>
+                </a:solidFill>
+              </a:rPr>
+              <a:t>processing</a:t>
+            </a:r>
+            <a:r>
+              <a:rPr lang="de-DE" sz="1200" dirty="0">
                 <a:solidFill>
                   <a:srgbClr val="063A5A"/>
                 </a:solidFill>
               </a:rPr>
               <a:t> </a:t>
             </a:r>
-          </a:p>
-          <a:p>
-            <a:r>
-              <a:rPr lang="de-DE" sz="1200" dirty="0" smtClean="0">
-                <a:solidFill>
-                  <a:srgbClr val="063A5A"/>
-                </a:solidFill>
-              </a:rPr>
-              <a:t>GBERT </a:t>
-            </a:r>
-            <a:r>
-              <a:rPr lang="de-DE" sz="1200" dirty="0" err="1" smtClean="0">
-                <a:solidFill>
-                  <a:srgbClr val="063A5A"/>
-                </a:solidFill>
-              </a:rPr>
-              <a:t>model</a:t>
-            </a:r>
-            <a:r>
-              <a:rPr lang="de-DE" sz="1200" dirty="0" smtClean="0">
+            <a:r>
+              <a:rPr lang="de-DE" sz="1200" dirty="0" err="1">
+                <a:solidFill>
+                  <a:srgbClr val="063A5A"/>
+                </a:solidFill>
+              </a:rPr>
+              <a:t>into</a:t>
+            </a:r>
+            <a:r>
+              <a:rPr lang="de-DE" sz="1200" dirty="0">
                 <a:solidFill>
                   <a:srgbClr val="063A5A"/>
                 </a:solidFill>
@@ -3796,7 +4409,89 @@
               <a:t> </a:t>
             </a:r>
             <a:r>
-              <a:rPr lang="de-DE" sz="1200" dirty="0" err="1" smtClean="0">
+              <a:rPr lang="de-DE" sz="1200" dirty="0" err="1">
+                <a:solidFill>
+                  <a:srgbClr val="063A5A"/>
+                </a:solidFill>
+              </a:rPr>
+              <a:t>structured</a:t>
+            </a:r>
+            <a:r>
+              <a:rPr lang="de-DE" sz="1200" dirty="0">
+                <a:solidFill>
+                  <a:srgbClr val="063A5A"/>
+                </a:solidFill>
+              </a:rPr>
+              <a:t> </a:t>
+            </a:r>
+            <a:r>
+              <a:rPr lang="de-DE" sz="1200" dirty="0" err="1">
+                <a:solidFill>
+                  <a:srgbClr val="063A5A"/>
+                </a:solidFill>
+              </a:rPr>
+              <a:t>outputs</a:t>
+            </a:r>
+            <a:r>
+              <a:rPr lang="de-DE" sz="1200" dirty="0">
+                <a:solidFill>
+                  <a:srgbClr val="063A5A"/>
+                </a:solidFill>
+              </a:rPr>
+              <a:t>(JSON)</a:t>
+            </a:r>
+          </a:p>
+          <a:p>
+            <a:r>
+              <a:rPr lang="de-DE" sz="1200" dirty="0" err="1">
+                <a:solidFill>
+                  <a:srgbClr val="063A5A"/>
+                </a:solidFill>
+              </a:rPr>
+              <a:t>Synthetic</a:t>
+            </a:r>
+            <a:r>
+              <a:rPr lang="de-DE" sz="1200" dirty="0">
+                <a:solidFill>
+                  <a:srgbClr val="063A5A"/>
+                </a:solidFill>
+              </a:rPr>
+              <a:t> </a:t>
+            </a:r>
+            <a:r>
+              <a:rPr lang="de-DE" sz="1200" dirty="0" err="1">
+                <a:solidFill>
+                  <a:srgbClr val="063A5A"/>
+                </a:solidFill>
+              </a:rPr>
+              <a:t>data</a:t>
+            </a:r>
+            <a:r>
+              <a:rPr lang="de-DE" sz="1200" dirty="0">
+                <a:solidFill>
+                  <a:srgbClr val="063A5A"/>
+                </a:solidFill>
+              </a:rPr>
+              <a:t> </a:t>
+            </a:r>
+            <a:r>
+              <a:rPr lang="de-DE" sz="1200" dirty="0" err="1">
+                <a:solidFill>
+                  <a:srgbClr val="063A5A"/>
+                </a:solidFill>
+              </a:rPr>
+              <a:t>used</a:t>
+            </a:r>
+            <a:r>
+              <a:rPr lang="de-DE" sz="1200" dirty="0">
+                <a:solidFill>
+                  <a:srgbClr val="063A5A"/>
+                </a:solidFill>
+              </a:rPr>
+              <a:t> </a:t>
+            </a:r>
+            <a:r>
+              <a:rPr lang="de-DE" sz="1200" dirty="0" err="1">
                 <a:solidFill>
                   <a:srgbClr val="063A5A"/>
                 </a:solidFill>
@@ -3804,23 +4499,7 @@
               <a:t>for</a:t>
             </a:r>
             <a:r>
-              <a:rPr lang="de-DE" sz="1200" dirty="0" smtClean="0">
-                <a:solidFill>
-                  <a:srgbClr val="063A5A"/>
-                </a:solidFill>
-              </a:rPr>
-              <a:t> NER </a:t>
-            </a:r>
-            <a:r>
-              <a:rPr lang="de-DE" sz="1200" dirty="0" err="1" smtClean="0">
-                <a:solidFill>
-                  <a:srgbClr val="063A5A"/>
-                </a:solidFill>
-              </a:rPr>
-              <a:t>token</a:t>
-            </a:r>
-            <a:r>
-              <a:rPr lang="de-DE" sz="1200" dirty="0" smtClean="0">
+              <a:rPr lang="de-DE" sz="1200" dirty="0">
                 <a:solidFill>
                   <a:srgbClr val="063A5A"/>
                 </a:solidFill>
@@ -3828,38 +4507,15 @@
               <a:t> </a:t>
             </a:r>
             <a:r>
-              <a:rPr lang="de-DE" sz="1200" dirty="0" err="1" smtClean="0">
-                <a:solidFill>
-                  <a:srgbClr val="063A5A"/>
-                </a:solidFill>
-              </a:rPr>
-              <a:t>level</a:t>
-            </a:r>
-            <a:endParaRPr lang="de-DE" sz="1200" dirty="0" smtClean="0">
-              <a:solidFill>
-                <a:srgbClr val="063A5A"/>
-              </a:solidFill>
-            </a:endParaRPr>
-          </a:p>
-          <a:p>
-            <a:r>
-              <a:rPr lang="de-DE" sz="1200" dirty="0" smtClean="0">
-                <a:solidFill>
-                  <a:srgbClr val="063A5A"/>
-                </a:solidFill>
-              </a:rPr>
-              <a:t>Post-</a:t>
-            </a:r>
-            <a:r>
-              <a:rPr lang="de-DE" sz="1200" dirty="0" err="1" smtClean="0">
-                <a:solidFill>
-                  <a:srgbClr val="063A5A"/>
-                </a:solidFill>
-              </a:rPr>
-              <a:t>processing</a:t>
-            </a:r>
-            <a:r>
-              <a:rPr lang="de-DE" sz="1200" dirty="0" smtClean="0">
+              <a:rPr lang="de-DE" sz="1200" dirty="0" err="1">
+                <a:solidFill>
+                  <a:srgbClr val="063A5A"/>
+                </a:solidFill>
+              </a:rPr>
+              <a:t>training</a:t>
+            </a:r>
+            <a:r>
+              <a:rPr lang="de-DE" sz="1200" dirty="0">
                 <a:solidFill>
                   <a:srgbClr val="063A5A"/>
                 </a:solidFill>
@@ -3867,15 +4523,15 @@
               <a:t> </a:t>
             </a:r>
             <a:r>
-              <a:rPr lang="de-DE" sz="1200" dirty="0" err="1" smtClean="0">
-                <a:solidFill>
-                  <a:srgbClr val="063A5A"/>
-                </a:solidFill>
-              </a:rPr>
-              <a:t>into</a:t>
-            </a:r>
-            <a:r>
-              <a:rPr lang="de-DE" sz="1200" dirty="0" smtClean="0">
+              <a:rPr lang="de-DE" sz="1200" dirty="0" err="1">
+                <a:solidFill>
+                  <a:srgbClr val="063A5A"/>
+                </a:solidFill>
+              </a:rPr>
+              <a:t>and</a:t>
+            </a:r>
+            <a:r>
+              <a:rPr lang="de-DE" sz="1200" dirty="0">
                 <a:solidFill>
                   <a:srgbClr val="063A5A"/>
                 </a:solidFill>
@@ -3883,137 +4539,7 @@
               <a:t> </a:t>
             </a:r>
             <a:r>
-              <a:rPr lang="de-DE" sz="1200" dirty="0" err="1" smtClean="0">
-                <a:solidFill>
-                  <a:srgbClr val="063A5A"/>
-                </a:solidFill>
-              </a:rPr>
-              <a:t>structured</a:t>
-            </a:r>
-            <a:r>
-              <a:rPr lang="de-DE" sz="1200" dirty="0" smtClean="0">
-                <a:solidFill>
-                  <a:srgbClr val="063A5A"/>
-                </a:solidFill>
-              </a:rPr>
-              <a:t> </a:t>
-            </a:r>
-            <a:r>
-              <a:rPr lang="de-DE" sz="1200" dirty="0" err="1" smtClean="0">
-                <a:solidFill>
-                  <a:srgbClr val="063A5A"/>
-                </a:solidFill>
-              </a:rPr>
-              <a:t>outputs</a:t>
-            </a:r>
-            <a:r>
-              <a:rPr lang="de-DE" sz="1200" dirty="0" smtClean="0">
-                <a:solidFill>
-                  <a:srgbClr val="063A5A"/>
-                </a:solidFill>
-              </a:rPr>
-              <a:t>(JSON)</a:t>
-            </a:r>
-          </a:p>
-          <a:p>
-            <a:r>
-              <a:rPr lang="de-DE" sz="1200" dirty="0" err="1" smtClean="0">
-                <a:solidFill>
-                  <a:srgbClr val="063A5A"/>
-                </a:solidFill>
-              </a:rPr>
-              <a:t>Synthetic</a:t>
-            </a:r>
-            <a:r>
-              <a:rPr lang="de-DE" sz="1200" dirty="0" smtClean="0">
-                <a:solidFill>
-                  <a:srgbClr val="063A5A"/>
-                </a:solidFill>
-              </a:rPr>
-              <a:t> </a:t>
-            </a:r>
-            <a:r>
-              <a:rPr lang="de-DE" sz="1200" dirty="0" err="1" smtClean="0">
-                <a:solidFill>
-                  <a:srgbClr val="063A5A"/>
-                </a:solidFill>
-              </a:rPr>
-              <a:t>data</a:t>
-            </a:r>
-            <a:r>
-              <a:rPr lang="de-DE" sz="1200" dirty="0" smtClean="0">
-                <a:solidFill>
-                  <a:srgbClr val="063A5A"/>
-                </a:solidFill>
-              </a:rPr>
-              <a:t> </a:t>
-            </a:r>
-            <a:r>
-              <a:rPr lang="de-DE" sz="1200" dirty="0" err="1" smtClean="0">
-                <a:solidFill>
-                  <a:srgbClr val="063A5A"/>
-                </a:solidFill>
-              </a:rPr>
-              <a:t>used</a:t>
-            </a:r>
-            <a:r>
-              <a:rPr lang="de-DE" sz="1200" dirty="0" smtClean="0">
-                <a:solidFill>
-                  <a:srgbClr val="063A5A"/>
-                </a:solidFill>
-              </a:rPr>
-              <a:t> </a:t>
-            </a:r>
-            <a:r>
-              <a:rPr lang="de-DE" sz="1200" dirty="0" err="1" smtClean="0">
-                <a:solidFill>
-                  <a:srgbClr val="063A5A"/>
-                </a:solidFill>
-              </a:rPr>
-              <a:t>for</a:t>
-            </a:r>
-            <a:r>
-              <a:rPr lang="de-DE" sz="1200" dirty="0" smtClean="0">
-                <a:solidFill>
-                  <a:srgbClr val="063A5A"/>
-                </a:solidFill>
-              </a:rPr>
-              <a:t> </a:t>
-            </a:r>
-            <a:r>
-              <a:rPr lang="de-DE" sz="1200" dirty="0" err="1" smtClean="0">
-                <a:solidFill>
-                  <a:srgbClr val="063A5A"/>
-                </a:solidFill>
-              </a:rPr>
-              <a:t>training</a:t>
-            </a:r>
-            <a:r>
-              <a:rPr lang="de-DE" sz="1200" dirty="0" smtClean="0">
-                <a:solidFill>
-                  <a:srgbClr val="063A5A"/>
-                </a:solidFill>
-              </a:rPr>
-              <a:t> </a:t>
-            </a:r>
-            <a:r>
-              <a:rPr lang="de-DE" sz="1200" dirty="0" err="1" smtClean="0">
-                <a:solidFill>
-                  <a:srgbClr val="063A5A"/>
-                </a:solidFill>
-              </a:rPr>
-              <a:t>and</a:t>
-            </a:r>
-            <a:r>
-              <a:rPr lang="de-DE" sz="1200" dirty="0" smtClean="0">
-                <a:solidFill>
-                  <a:srgbClr val="063A5A"/>
-                </a:solidFill>
-              </a:rPr>
-              <a:t> </a:t>
-            </a:r>
-            <a:r>
-              <a:rPr lang="de-DE" sz="1200" dirty="0" err="1" smtClean="0">
+              <a:rPr lang="de-DE" sz="1200" dirty="0" err="1">
                 <a:solidFill>
                   <a:srgbClr val="063A5A"/>
                 </a:solidFill>
@@ -4051,7 +4577,7 @@
           <a:lstStyle/>
           <a:p>
             <a:r>
-              <a:rPr lang="de-DE" sz="1200" dirty="0" err="1" smtClean="0">
+              <a:rPr lang="de-DE" sz="1200" dirty="0" err="1">
                 <a:solidFill>
                   <a:srgbClr val="063A5A"/>
                 </a:solidFill>
@@ -4059,7 +4585,7 @@
               <a:t>Map</a:t>
             </a:r>
             <a:r>
-              <a:rPr lang="de-DE" sz="1200" dirty="0" smtClean="0">
+              <a:rPr lang="de-DE" sz="1200" dirty="0">
                 <a:solidFill>
                   <a:srgbClr val="063A5A"/>
                 </a:solidFill>
@@ -4067,7 +4593,7 @@
               <a:t> </a:t>
             </a:r>
             <a:r>
-              <a:rPr lang="de-DE" sz="1200" dirty="0" err="1" smtClean="0">
+              <a:rPr lang="de-DE" sz="1200" dirty="0" err="1">
                 <a:solidFill>
                   <a:srgbClr val="063A5A"/>
                 </a:solidFill>
@@ -4075,7 +4601,7 @@
               <a:t>extracted</a:t>
             </a:r>
             <a:r>
-              <a:rPr lang="de-DE" sz="1200" dirty="0" smtClean="0">
+              <a:rPr lang="de-DE" sz="1200" dirty="0">
                 <a:solidFill>
                   <a:srgbClr val="063A5A"/>
                 </a:solidFill>
@@ -4083,7 +4609,7 @@
               <a:t> </a:t>
             </a:r>
             <a:r>
-              <a:rPr lang="de-DE" sz="1200" dirty="0" err="1" smtClean="0">
+              <a:rPr lang="de-DE" sz="1200" dirty="0" err="1">
                 <a:solidFill>
                   <a:srgbClr val="063A5A"/>
                 </a:solidFill>
@@ -4091,7 +4617,7 @@
               <a:t>entities</a:t>
             </a:r>
             <a:r>
-              <a:rPr lang="de-DE" sz="1200" dirty="0" smtClean="0">
+              <a:rPr lang="de-DE" sz="1200" dirty="0">
                 <a:solidFill>
                   <a:srgbClr val="063A5A"/>
                 </a:solidFill>
@@ -4099,7 +4625,7 @@
               <a:t> </a:t>
             </a:r>
             <a:r>
-              <a:rPr lang="de-DE" sz="1200" dirty="0" err="1" smtClean="0">
+              <a:rPr lang="de-DE" sz="1200" dirty="0" err="1">
                 <a:solidFill>
                   <a:srgbClr val="063A5A"/>
                 </a:solidFill>
@@ -4107,7 +4633,7 @@
               <a:t>to</a:t>
             </a:r>
             <a:r>
-              <a:rPr lang="de-DE" sz="1200" dirty="0" smtClean="0">
+              <a:rPr lang="de-DE" sz="1200" dirty="0">
                 <a:solidFill>
                   <a:srgbClr val="063A5A"/>
                 </a:solidFill>
@@ -4117,7 +4643,7 @@
           </a:p>
           <a:p>
             <a:r>
-              <a:rPr lang="de-DE" sz="1200" dirty="0" err="1" smtClean="0">
+              <a:rPr lang="de-DE" sz="1200" dirty="0" err="1">
                 <a:solidFill>
                   <a:srgbClr val="063A5A"/>
                 </a:solidFill>
@@ -4125,7 +4651,7 @@
               <a:t>Embed</a:t>
             </a:r>
             <a:r>
-              <a:rPr lang="de-DE" sz="1200" dirty="0" smtClean="0">
+              <a:rPr lang="de-DE" sz="1200" dirty="0">
                 <a:solidFill>
                   <a:srgbClr val="063A5A"/>
                 </a:solidFill>
@@ -4135,7 +4661,7 @@
           </a:p>
           <a:p>
             <a:r>
-              <a:rPr lang="de-DE" sz="1200" dirty="0" smtClean="0">
+              <a:rPr lang="de-DE" sz="1200" dirty="0">
                 <a:solidFill>
                   <a:srgbClr val="063A5A"/>
                 </a:solidFill>
@@ -4143,7 +4669,7 @@
               <a:t>Evaluation on </a:t>
             </a:r>
             <a:r>
-              <a:rPr lang="de-DE" sz="1200" dirty="0" err="1" smtClean="0">
+              <a:rPr lang="de-DE" sz="1200" dirty="0" err="1">
                 <a:solidFill>
                   <a:srgbClr val="063A5A"/>
                 </a:solidFill>
@@ -4151,7 +4677,7 @@
               <a:t>complex</a:t>
             </a:r>
             <a:r>
-              <a:rPr lang="de-DE" sz="1200" dirty="0" smtClean="0">
+              <a:rPr lang="de-DE" sz="1200" dirty="0">
                 <a:solidFill>
                   <a:srgbClr val="063A5A"/>
                 </a:solidFill>
@@ -4159,7 +4685,7 @@
               <a:t>  </a:t>
             </a:r>
             <a:r>
-              <a:rPr lang="de-DE" sz="1200" dirty="0" err="1" smtClean="0">
+              <a:rPr lang="de-DE" sz="1200" dirty="0" err="1">
                 <a:solidFill>
                   <a:srgbClr val="063A5A"/>
                 </a:solidFill>
@@ -4167,7 +4693,7 @@
               <a:t>clinical</a:t>
             </a:r>
             <a:r>
-              <a:rPr lang="de-DE" sz="1200" dirty="0" smtClean="0">
+              <a:rPr lang="de-DE" sz="1200" dirty="0">
                 <a:solidFill>
                   <a:srgbClr val="063A5A"/>
                 </a:solidFill>
@@ -4175,7 +4701,7 @@
               <a:t> </a:t>
             </a:r>
             <a:r>
-              <a:rPr lang="de-DE" sz="1200" dirty="0" err="1" smtClean="0">
+              <a:rPr lang="de-DE" sz="1200" dirty="0" err="1">
                 <a:solidFill>
                   <a:srgbClr val="063A5A"/>
                 </a:solidFill>
@@ -4203,6 +4729,9 @@
             <a:chOff x="6115143" y="1553171"/>
             <a:chExt cx="2819448" cy="2718441"/>
           </a:xfrm>
+          <a:solidFill>
+            <a:srgbClr val="FFFF00"/>
+          </a:solidFill>
         </p:grpSpPr>
         <p:sp>
           <p:nvSpPr>
@@ -4213,12 +4742,12 @@
           <p:spPr>
             <a:xfrm>
               <a:off x="6687703" y="1553171"/>
-              <a:ext cx="1534266" cy="400110"/>
+              <a:ext cx="1556836" cy="400110"/>
             </a:xfrm>
             <a:prstGeom prst="rect">
               <a:avLst/>
             </a:prstGeom>
-            <a:noFill/>
+            <a:grpFill/>
           </p:spPr>
           <p:txBody>
             <a:bodyPr wrap="none" rtlCol="0">
@@ -4227,18 +4756,13 @@
             <a:lstStyle/>
             <a:p>
               <a:r>
-                <a:rPr lang="de-DE" sz="2000" b="1" dirty="0" smtClean="0">
+                <a:rPr lang="de-DE" sz="2000" b="1" dirty="0">
                   <a:solidFill>
                     <a:srgbClr val="063A5A"/>
                   </a:solidFill>
                 </a:rPr>
                 <a:t>KEY RESULTS</a:t>
               </a:r>
-              <a:endParaRPr lang="de-DE" sz="2000" b="1" dirty="0">
-                <a:solidFill>
-                  <a:srgbClr val="063A5A"/>
-                </a:solidFill>
-              </a:endParaRPr>
             </a:p>
           </p:txBody>
         </p:sp>
@@ -4264,6 +4788,7 @@
             <a:prstGeom prst="rect">
               <a:avLst/>
             </a:prstGeom>
+            <a:grpFill/>
           </p:spPr>
         </p:pic>
         <p:pic>
@@ -4288,6 +4813,7 @@
             <a:prstGeom prst="rect">
               <a:avLst/>
             </a:prstGeom>
+            <a:grpFill/>
           </p:spPr>
         </p:pic>
         <p:sp>
@@ -4304,7 +4830,7 @@
             <a:prstGeom prst="rect">
               <a:avLst/>
             </a:prstGeom>
-            <a:noFill/>
+            <a:grpFill/>
           </p:spPr>
           <p:txBody>
             <a:bodyPr wrap="none" rtlCol="0">
@@ -4313,7 +4839,7 @@
             <a:lstStyle/>
             <a:p>
               <a:r>
-                <a:rPr lang="de-DE" sz="1200" dirty="0" smtClean="0">
+                <a:rPr lang="de-DE" sz="1200" dirty="0">
                   <a:solidFill>
                     <a:srgbClr val="063A5A"/>
                   </a:solidFill>
@@ -4321,7 +4847,7 @@
                 <a:t>High </a:t>
               </a:r>
               <a:r>
-                <a:rPr lang="de-DE" sz="1200" dirty="0" err="1" smtClean="0">
+                <a:rPr lang="de-DE" sz="1200" dirty="0" err="1">
                   <a:solidFill>
                     <a:srgbClr val="063A5A"/>
                   </a:solidFill>
@@ -4329,7 +4855,7 @@
                 <a:t>performance</a:t>
               </a:r>
               <a:r>
-                <a:rPr lang="de-DE" sz="1200" dirty="0" smtClean="0">
+                <a:rPr lang="de-DE" sz="1200" dirty="0">
                   <a:solidFill>
                     <a:srgbClr val="063A5A"/>
                   </a:solidFill>
@@ -4339,7 +4865,7 @@
             </a:p>
             <a:p>
               <a:r>
-                <a:rPr lang="de-DE" sz="1200" dirty="0" err="1" smtClean="0">
+                <a:rPr lang="de-DE" sz="1200" dirty="0" err="1">
                   <a:solidFill>
                     <a:srgbClr val="063A5A"/>
                   </a:solidFill>
@@ -4355,7 +4881,7 @@
                 <a:t> </a:t>
               </a:r>
               <a:r>
-                <a:rPr lang="de-DE" sz="1200" dirty="0" err="1" smtClean="0">
+                <a:rPr lang="de-DE" sz="1200" dirty="0" err="1">
                   <a:solidFill>
                     <a:srgbClr val="063A5A"/>
                   </a:solidFill>
@@ -4370,60 +4896,23 @@
             </a:p>
             <a:p>
               <a:r>
-                <a:rPr lang="de-DE" sz="1200" b="1" dirty="0" smtClean="0">
+                <a:rPr lang="de-DE" sz="1200" b="1" dirty="0">
                   <a:solidFill>
                     <a:srgbClr val="063A5A"/>
                   </a:solidFill>
                 </a:rPr>
-                <a:t>DATE </a:t>
+                <a:t>DATE ≈ 0.90</a:t>
               </a:r>
+            </a:p>
+            <a:p>
               <a:r>
                 <a:rPr lang="de-DE" sz="1200" b="1" dirty="0">
                   <a:solidFill>
                     <a:srgbClr val="063A5A"/>
                   </a:solidFill>
                 </a:rPr>
-                <a:t>≈ </a:t>
+                <a:t>ORG, DOCTOR ≈ 0.85</a:t>
               </a:r>
-              <a:r>
-                <a:rPr lang="de-DE" sz="1200" b="1" dirty="0" smtClean="0">
-                  <a:solidFill>
-                    <a:srgbClr val="063A5A"/>
-                  </a:solidFill>
-                </a:rPr>
-                <a:t>0.90</a:t>
-              </a:r>
-            </a:p>
-            <a:p>
-              <a:r>
-                <a:rPr lang="de-DE" sz="1200" b="1" dirty="0" smtClean="0">
-                  <a:solidFill>
-                    <a:srgbClr val="063A5A"/>
-                  </a:solidFill>
-                </a:rPr>
-                <a:t>ORG, </a:t>
-              </a:r>
-              <a:r>
-                <a:rPr lang="de-DE" sz="1200" b="1" dirty="0">
-                  <a:solidFill>
-                    <a:srgbClr val="063A5A"/>
-                  </a:solidFill>
-                </a:rPr>
-                <a:t>DOCTOR ≈ </a:t>
-              </a:r>
-              <a:r>
-                <a:rPr lang="de-DE" sz="1200" b="1" dirty="0" smtClean="0">
-                  <a:solidFill>
-                    <a:srgbClr val="063A5A"/>
-                  </a:solidFill>
-                </a:rPr>
-                <a:t>0.85</a:t>
-              </a:r>
-              <a:endParaRPr lang="de-DE" sz="1200" b="1" dirty="0">
-                <a:solidFill>
-                  <a:srgbClr val="063A5A"/>
-                </a:solidFill>
-              </a:endParaRPr>
             </a:p>
           </p:txBody>
         </p:sp>
@@ -4441,7 +4930,7 @@
             <a:prstGeom prst="rect">
               <a:avLst/>
             </a:prstGeom>
-            <a:noFill/>
+            <a:grpFill/>
           </p:spPr>
           <p:txBody>
             <a:bodyPr wrap="none" rtlCol="0">
@@ -4450,7 +4939,7 @@
             <a:lstStyle/>
             <a:p>
               <a:r>
-                <a:rPr lang="de-DE" sz="1200" dirty="0" err="1" smtClean="0">
+                <a:rPr lang="de-DE" sz="1200" dirty="0" err="1">
                   <a:solidFill>
                     <a:srgbClr val="063A5A"/>
                   </a:solidFill>
@@ -4458,7 +4947,7 @@
                 <a:t>Lower</a:t>
               </a:r>
               <a:r>
-                <a:rPr lang="de-DE" sz="1200" dirty="0" smtClean="0">
+                <a:rPr lang="de-DE" sz="1200" dirty="0">
                   <a:solidFill>
                     <a:srgbClr val="063A5A"/>
                   </a:solidFill>
@@ -4466,7 +4955,7 @@
                 <a:t> </a:t>
               </a:r>
               <a:r>
-                <a:rPr lang="de-DE" sz="1200" dirty="0" err="1" smtClean="0">
+                <a:rPr lang="de-DE" sz="1200" dirty="0" err="1">
                   <a:solidFill>
                     <a:srgbClr val="063A5A"/>
                   </a:solidFill>
@@ -4474,7 +4963,7 @@
                 <a:t>performance</a:t>
               </a:r>
               <a:r>
-                <a:rPr lang="de-DE" sz="1200" dirty="0" smtClean="0">
+                <a:rPr lang="de-DE" sz="1200" dirty="0">
                   <a:solidFill>
                     <a:srgbClr val="063A5A"/>
                   </a:solidFill>
@@ -4484,7 +4973,7 @@
             </a:p>
             <a:p>
               <a:r>
-                <a:rPr lang="de-DE" sz="1200" dirty="0" err="1" smtClean="0">
+                <a:rPr lang="de-DE" sz="1200" dirty="0" err="1">
                   <a:solidFill>
                     <a:srgbClr val="063A5A"/>
                   </a:solidFill>
@@ -4492,7 +4981,7 @@
                 <a:t>complex</a:t>
               </a:r>
               <a:r>
-                <a:rPr lang="de-DE" sz="1200" dirty="0" smtClean="0">
+                <a:rPr lang="de-DE" sz="1200" dirty="0">
                   <a:solidFill>
                     <a:srgbClr val="063A5A"/>
                   </a:solidFill>
@@ -4500,7 +4989,7 @@
                 <a:t> </a:t>
               </a:r>
               <a:r>
-                <a:rPr lang="de-DE" sz="1200" dirty="0" err="1" smtClean="0">
+                <a:rPr lang="de-DE" sz="1200" dirty="0" err="1">
                   <a:solidFill>
                     <a:srgbClr val="063A5A"/>
                   </a:solidFill>
@@ -4515,7 +5004,7 @@
             </a:p>
             <a:p>
               <a:r>
-                <a:rPr lang="de-DE" sz="1200" b="1" dirty="0" smtClean="0">
+                <a:rPr lang="de-DE" sz="1200" b="1" dirty="0">
                   <a:solidFill>
                     <a:srgbClr val="063A5A"/>
                   </a:solidFill>
@@ -4525,34 +5014,13 @@
             </a:p>
             <a:p>
               <a:r>
-                <a:rPr lang="de-DE" sz="1200" b="1" dirty="0" smtClean="0">
-                  <a:solidFill>
-                    <a:srgbClr val="063A5A"/>
-                  </a:solidFill>
-                </a:rPr>
-                <a:t>MEDICATION </a:t>
-              </a:r>
-              <a:r>
                 <a:rPr lang="de-DE" sz="1200" b="1" dirty="0">
                   <a:solidFill>
                     <a:srgbClr val="063A5A"/>
                   </a:solidFill>
                 </a:rPr>
-                <a:t>≈ </a:t>
+                <a:t>MEDICATION ≈ 0.60</a:t>
               </a:r>
-              <a:r>
-                <a:rPr lang="de-DE" sz="1200" b="1" dirty="0" smtClean="0">
-                  <a:solidFill>
-                    <a:srgbClr val="063A5A"/>
-                  </a:solidFill>
-                </a:rPr>
-                <a:t>0.60</a:t>
-              </a:r>
-              <a:endParaRPr lang="de-DE" sz="1200" b="1" dirty="0">
-                <a:solidFill>
-                  <a:srgbClr val="063A5A"/>
-                </a:solidFill>
-              </a:endParaRPr>
             </a:p>
           </p:txBody>
         </p:sp>
@@ -4570,7 +5038,7 @@
             <a:prstGeom prst="rect">
               <a:avLst/>
             </a:prstGeom>
-            <a:noFill/>
+            <a:grpFill/>
           </p:spPr>
           <p:txBody>
             <a:bodyPr wrap="none" rtlCol="0">
@@ -4579,7 +5047,7 @@
             <a:lstStyle/>
             <a:p>
               <a:r>
-                <a:rPr lang="de-DE" sz="1200" dirty="0" err="1" smtClean="0">
+                <a:rPr lang="de-DE" sz="1200" dirty="0" err="1">
                   <a:solidFill>
                     <a:srgbClr val="063A5A"/>
                   </a:solidFill>
@@ -4587,7 +5055,7 @@
                 <a:t>Frequent</a:t>
               </a:r>
               <a:r>
-                <a:rPr lang="de-DE" sz="1200" dirty="0" smtClean="0">
+                <a:rPr lang="de-DE" sz="1200" dirty="0">
                   <a:solidFill>
                     <a:srgbClr val="063A5A"/>
                   </a:solidFill>
@@ -4595,7 +5063,7 @@
                 <a:t> </a:t>
               </a:r>
               <a:r>
-                <a:rPr lang="de-DE" sz="1200" dirty="0" err="1" smtClean="0">
+                <a:rPr lang="de-DE" sz="1200" dirty="0" err="1">
                   <a:solidFill>
                     <a:srgbClr val="063A5A"/>
                   </a:solidFill>
@@ -4610,7 +5078,7 @@
             </a:p>
             <a:p>
               <a:r>
-                <a:rPr lang="de-DE" sz="1200" b="1" dirty="0" smtClean="0">
+                <a:rPr lang="de-DE" sz="1200" b="1" dirty="0">
                   <a:solidFill>
                     <a:srgbClr val="063A5A"/>
                   </a:solidFill>
@@ -4618,7 +5086,7 @@
                 <a:t>SYMPTOMS </a:t>
               </a:r>
               <a:r>
-                <a:rPr lang="de-DE" sz="1200" b="1" dirty="0" err="1" smtClean="0">
+                <a:rPr lang="de-DE" sz="1200" b="1" dirty="0" err="1">
                   <a:solidFill>
                     <a:srgbClr val="063A5A"/>
                   </a:solidFill>
@@ -4626,7 +5094,7 @@
                 <a:t>vs</a:t>
               </a:r>
               <a:r>
-                <a:rPr lang="de-DE" sz="1200" b="1" dirty="0" smtClean="0">
+                <a:rPr lang="de-DE" sz="1200" b="1" dirty="0">
                   <a:solidFill>
                     <a:srgbClr val="063A5A"/>
                   </a:solidFill>
@@ -4705,18 +5173,13 @@
             <a:lstStyle/>
             <a:p>
               <a:r>
-                <a:rPr lang="de-DE" sz="2000" b="1" dirty="0" smtClean="0">
+                <a:rPr lang="de-DE" sz="2000" b="1" dirty="0">
                   <a:solidFill>
                     <a:srgbClr val="063A5A"/>
                   </a:solidFill>
                 </a:rPr>
                 <a:t>EVALUATION</a:t>
               </a:r>
-              <a:endParaRPr lang="de-DE" sz="2000" b="1" dirty="0">
-                <a:solidFill>
-                  <a:srgbClr val="063A5A"/>
-                </a:solidFill>
-              </a:endParaRPr>
             </a:p>
           </p:txBody>
         </p:sp>
@@ -4743,7 +5206,7 @@
             <a:lstStyle/>
             <a:p>
               <a:r>
-                <a:rPr lang="de-DE" sz="1200" dirty="0" smtClean="0">
+                <a:rPr lang="de-DE" sz="1200" dirty="0">
                   <a:solidFill>
                     <a:srgbClr val="063A5A"/>
                   </a:solidFill>
@@ -4751,7 +5214,7 @@
                 <a:t>Entity-level-</a:t>
               </a:r>
               <a:r>
-                <a:rPr lang="de-DE" sz="1200" dirty="0" err="1" smtClean="0">
+                <a:rPr lang="de-DE" sz="1200" dirty="0" err="1">
                   <a:solidFill>
                     <a:srgbClr val="063A5A"/>
                   </a:solidFill>
@@ -4759,7 +5222,7 @@
                 <a:t>metrics</a:t>
               </a:r>
               <a:r>
-                <a:rPr lang="de-DE" sz="1200" dirty="0" smtClean="0">
+                <a:rPr lang="de-DE" sz="1200" dirty="0">
                   <a:solidFill>
                     <a:srgbClr val="063A5A"/>
                   </a:solidFill>
@@ -4774,20 +5237,12 @@
                     <a:srgbClr val="063A5A"/>
                   </a:solidFill>
                 </a:rPr>
-                <a:t>-</a:t>
-              </a:r>
-              <a:r>
-                <a:rPr lang="de-DE" sz="1200" dirty="0" smtClean="0">
-                  <a:solidFill>
-                    <a:srgbClr val="063A5A"/>
-                  </a:solidFill>
-                </a:rPr>
-                <a:t>Precision, Recall, F1</a:t>
+                <a:t>-Precision, Recall, F1</a:t>
               </a:r>
             </a:p>
             <a:p>
               <a:r>
-                <a:rPr lang="de-DE" sz="1200" dirty="0" err="1" smtClean="0">
+                <a:rPr lang="de-DE" sz="1200" dirty="0" err="1">
                   <a:solidFill>
                     <a:srgbClr val="063A5A"/>
                   </a:solidFill>
@@ -4795,7 +5250,7 @@
                 <a:t>Confusion</a:t>
               </a:r>
               <a:r>
-                <a:rPr lang="de-DE" sz="1200" dirty="0" smtClean="0">
+                <a:rPr lang="de-DE" sz="1200" dirty="0">
                   <a:solidFill>
                     <a:srgbClr val="063A5A"/>
                   </a:solidFill>
@@ -4809,7 +5264,7 @@
                 <a:buChar char="-"/>
               </a:pPr>
               <a:r>
-                <a:rPr lang="de-DE" sz="1200" dirty="0" smtClean="0">
+                <a:rPr lang="de-DE" sz="1200" dirty="0">
                   <a:solidFill>
                     <a:srgbClr val="063A5A"/>
                   </a:solidFill>
@@ -4817,7 +5272,7 @@
                 <a:t>Bar </a:t>
               </a:r>
               <a:r>
-                <a:rPr lang="de-DE" sz="1200" dirty="0" err="1" smtClean="0">
+                <a:rPr lang="de-DE" sz="1200" dirty="0" err="1">
                   <a:solidFill>
                     <a:srgbClr val="063A5A"/>
                   </a:solidFill>
@@ -4825,7 +5280,7 @@
                 <a:t>chart</a:t>
               </a:r>
               <a:r>
-                <a:rPr lang="de-DE" sz="1200" dirty="0" smtClean="0">
+                <a:rPr lang="de-DE" sz="1200" dirty="0">
                   <a:solidFill>
                     <a:srgbClr val="063A5A"/>
                   </a:solidFill>
@@ -4833,14 +5288,14 @@
                 <a:t> &amp; </a:t>
               </a:r>
               <a:r>
-                <a:rPr lang="de-DE" sz="1200" dirty="0" err="1" smtClean="0">
+                <a:rPr lang="de-DE" sz="1200" dirty="0" err="1">
                   <a:solidFill>
                     <a:srgbClr val="063A5A"/>
                   </a:solidFill>
                 </a:rPr>
                 <a:t>Heatmap</a:t>
               </a:r>
-              <a:endParaRPr lang="de-DE" sz="1200" dirty="0" smtClean="0">
+              <a:endParaRPr lang="de-DE" sz="1200" dirty="0">
                 <a:solidFill>
                   <a:srgbClr val="063A5A"/>
                 </a:solidFill>
@@ -4852,7 +5307,7 @@
                 <a:buChar char="-"/>
               </a:pPr>
               <a:r>
-                <a:rPr lang="de-DE" sz="1200" dirty="0" err="1" smtClean="0">
+                <a:rPr lang="de-DE" sz="1200" dirty="0" err="1">
                   <a:solidFill>
                     <a:srgbClr val="063A5A"/>
                   </a:solidFill>
@@ -4860,7 +5315,7 @@
                 <a:t>Misclassifications</a:t>
               </a:r>
               <a:r>
-                <a:rPr lang="de-DE" sz="1200" dirty="0" smtClean="0">
+                <a:rPr lang="de-DE" sz="1200" dirty="0">
                   <a:solidFill>
                     <a:srgbClr val="063A5A"/>
                   </a:solidFill>
@@ -4868,7 +5323,7 @@
                 <a:t> </a:t>
               </a:r>
               <a:r>
-                <a:rPr lang="de-DE" sz="1200" dirty="0" err="1" smtClean="0">
+                <a:rPr lang="de-DE" sz="1200" dirty="0" err="1">
                   <a:solidFill>
                     <a:srgbClr val="063A5A"/>
                   </a:solidFill>
@@ -4905,7 +5360,9 @@
           <a:prstGeom prst="rect">
             <a:avLst/>
           </a:prstGeom>
-          <a:noFill/>
+          <a:solidFill>
+            <a:srgbClr val="FFFF00"/>
+          </a:solidFill>
         </p:spPr>
         <p:txBody>
           <a:bodyPr wrap="none">
@@ -4961,7 +5418,7 @@
 </p:sld>
 </file>
 
-<file path=ppt/slides/slide2.xml><?xml version="1.0" encoding="utf-8"?>
+<file path=ppt/slides/slide6.xml><?xml version="1.0" encoding="utf-8"?>
 <p:sld xmlns:a="http://schemas.openxmlformats.org/drawingml/2006/main" xmlns:r="http://schemas.openxmlformats.org/officeDocument/2006/relationships" xmlns:p="http://schemas.openxmlformats.org/presentationml/2006/main">
   <p:cSld>
     <p:spTree>
@@ -5242,7 +5699,9 @@
           <a:prstGeom prst="rect">
             <a:avLst/>
           </a:prstGeom>
-          <a:noFill/>
+          <a:solidFill>
+            <a:srgbClr val="FFFF00"/>
+          </a:solidFill>
         </p:spPr>
         <p:txBody>
           <a:bodyPr wrap="none">
@@ -5258,6 +5717,7 @@
               </a:defRPr>
             </a:pPr>
             <a:r>
+              <a:rPr dirty="0"/>
               <a:t>📌 Take-home message: Framework reliably evaluates NER models on synthetic clinical text.</a:t>
             </a:r>
           </a:p>
@@ -5270,6 +5730,7 @@
               </a:defRPr>
             </a:pPr>
             <a:r>
+              <a:rPr dirty="0"/>
               <a:t>Strong performance on structured data, challenges remain in clinical semantics.</a:t>
             </a:r>
           </a:p>
@@ -5418,6 +5879,94 @@
         </p:txBody>
       </p:sp>
     </p:spTree>
+  </p:cSld>
+  <p:clrMapOvr>
+    <a:masterClrMapping/>
+  </p:clrMapOvr>
+</p:sld>
+</file>
+
+<file path=ppt/slides/slide7.xml><?xml version="1.0" encoding="utf-8"?>
+<p:sld xmlns:a="http://schemas.openxmlformats.org/drawingml/2006/main" xmlns:r="http://schemas.openxmlformats.org/officeDocument/2006/relationships" xmlns:p="http://schemas.openxmlformats.org/presentationml/2006/main">
+  <p:cSld>
+    <p:spTree>
+      <p:nvGrpSpPr>
+        <p:cNvPr id="1" name=""/>
+        <p:cNvGrpSpPr/>
+        <p:nvPr/>
+      </p:nvGrpSpPr>
+      <p:grpSpPr>
+        <a:xfrm>
+          <a:off x="0" y="0"/>
+          <a:ext cx="0" cy="0"/>
+          <a:chOff x="0" y="0"/>
+          <a:chExt cx="0" cy="0"/>
+        </a:xfrm>
+      </p:grpSpPr>
+      <p:sp>
+        <p:nvSpPr>
+          <p:cNvPr id="2" name="Titel 1">
+            <a:extLst>
+              <a:ext uri="{FF2B5EF4-FFF2-40B4-BE49-F238E27FC236}">
+                <a16:creationId xmlns:a16="http://schemas.microsoft.com/office/drawing/2014/main" id="{CCF35026-ACC8-EC41-74F9-2C073D768D8B}"/>
+              </a:ext>
+            </a:extLst>
+          </p:cNvPr>
+          <p:cNvSpPr>
+            <a:spLocks noGrp="1"/>
+          </p:cNvSpPr>
+          <p:nvPr>
+            <p:ph type="title"/>
+          </p:nvPr>
+        </p:nvSpPr>
+        <p:spPr/>
+        <p:txBody>
+          <a:bodyPr/>
+          <a:lstStyle/>
+          <a:p>
+            <a:r>
+              <a:rPr lang="de-DE" dirty="0"/>
+              <a:t>THE BIG PICTURE</a:t>
+            </a:r>
+          </a:p>
+        </p:txBody>
+      </p:sp>
+      <p:pic>
+        <p:nvPicPr>
+          <p:cNvPr id="4" name="Grafik 3">
+            <a:extLst>
+              <a:ext uri="{FF2B5EF4-FFF2-40B4-BE49-F238E27FC236}">
+                <a16:creationId xmlns:a16="http://schemas.microsoft.com/office/drawing/2014/main" id="{D9800E16-0313-CC28-C6EE-18DC5C532DE4}"/>
+              </a:ext>
+            </a:extLst>
+          </p:cNvPr>
+          <p:cNvPicPr>
+            <a:picLocks noChangeAspect="1"/>
+          </p:cNvPicPr>
+          <p:nvPr/>
+        </p:nvPicPr>
+        <p:blipFill>
+          <a:blip r:embed="rId2"/>
+          <a:stretch>
+            <a:fillRect/>
+          </a:stretch>
+        </p:blipFill>
+        <p:spPr>
+          <a:xfrm>
+            <a:off x="658368" y="1417638"/>
+            <a:ext cx="7528346" cy="4897660"/>
+          </a:xfrm>
+          <a:prstGeom prst="rect">
+            <a:avLst/>
+          </a:prstGeom>
+        </p:spPr>
+      </p:pic>
+    </p:spTree>
+    <p:extLst>
+      <p:ext uri="{BB962C8B-B14F-4D97-AF65-F5344CB8AC3E}">
+        <p14:creationId xmlns:p14="http://schemas.microsoft.com/office/powerpoint/2010/main" val="3668486584"/>
+      </p:ext>
+    </p:extLst>
   </p:cSld>
   <p:clrMapOvr>
     <a:masterClrMapping/>

--- a/documents/visual_abstract_NER.pptx
+++ b/documents/visual_abstract_NER.pptx
@@ -9,9 +9,10 @@
     <p:sldId id="260" r:id="rId3"/>
     <p:sldId id="261" r:id="rId4"/>
     <p:sldId id="262" r:id="rId5"/>
-    <p:sldId id="257" r:id="rId6"/>
-    <p:sldId id="256" r:id="rId7"/>
-    <p:sldId id="259" r:id="rId8"/>
+    <p:sldId id="263" r:id="rId6"/>
+    <p:sldId id="257" r:id="rId7"/>
+    <p:sldId id="256" r:id="rId8"/>
+    <p:sldId id="259" r:id="rId9"/>
   </p:sldIdLst>
   <p:sldSz cx="9144000" cy="6858000" type="screen4x3"/>
   <p:notesSz cx="6858000" cy="9144000"/>
@@ -3326,8 +3327,8 @@
         </p:blipFill>
         <p:spPr>
           <a:xfrm>
-            <a:off x="2343060" y="235741"/>
-            <a:ext cx="4128696" cy="3193259"/>
+            <a:off x="2573648" y="0"/>
+            <a:ext cx="3032022" cy="2345058"/>
           </a:xfrm>
           <a:prstGeom prst="rect">
             <a:avLst/>
@@ -3738,6 +3739,286 @@
 </file>
 
 <file path=ppt/slides/slide5.xml><?xml version="1.0" encoding="utf-8"?>
+<p:sld xmlns:a="http://schemas.openxmlformats.org/drawingml/2006/main" xmlns:r="http://schemas.openxmlformats.org/officeDocument/2006/relationships" xmlns:p="http://schemas.openxmlformats.org/presentationml/2006/main">
+  <p:cSld>
+    <p:spTree>
+      <p:nvGrpSpPr>
+        <p:cNvPr id="1" name=""/>
+        <p:cNvGrpSpPr/>
+        <p:nvPr/>
+      </p:nvGrpSpPr>
+      <p:grpSpPr>
+        <a:xfrm>
+          <a:off x="0" y="0"/>
+          <a:ext cx="0" cy="0"/>
+          <a:chOff x="0" y="0"/>
+          <a:chExt cx="0" cy="0"/>
+        </a:xfrm>
+      </p:grpSpPr>
+      <p:sp>
+        <p:nvSpPr>
+          <p:cNvPr id="2" name="Titel 1">
+            <a:extLst>
+              <a:ext uri="{FF2B5EF4-FFF2-40B4-BE49-F238E27FC236}">
+                <a16:creationId xmlns:a16="http://schemas.microsoft.com/office/drawing/2014/main" id="{61658E02-7D76-13D4-8CD7-15DC687AADCB}"/>
+              </a:ext>
+            </a:extLst>
+          </p:cNvPr>
+          <p:cNvSpPr>
+            <a:spLocks noGrp="1"/>
+          </p:cNvSpPr>
+          <p:nvPr>
+            <p:ph type="title"/>
+          </p:nvPr>
+        </p:nvSpPr>
+        <p:spPr>
+          <a:xfrm>
+            <a:off x="0" y="20196"/>
+            <a:ext cx="8229600" cy="1143000"/>
+          </a:xfrm>
+        </p:spPr>
+        <p:txBody>
+          <a:bodyPr/>
+          <a:lstStyle/>
+          <a:p>
+            <a:r>
+              <a:rPr lang="de-DE" dirty="0" err="1"/>
+              <a:t>Let‘s</a:t>
+            </a:r>
+            <a:r>
+              <a:rPr lang="de-DE" dirty="0"/>
+              <a:t> </a:t>
+            </a:r>
+            <a:r>
+              <a:rPr lang="de-DE" dirty="0" err="1"/>
+              <a:t>start</a:t>
+            </a:r>
+            <a:r>
+              <a:rPr lang="de-DE" dirty="0"/>
+              <a:t>…</a:t>
+            </a:r>
+          </a:p>
+        </p:txBody>
+      </p:sp>
+      <p:sp>
+        <p:nvSpPr>
+          <p:cNvPr id="3" name="Textfeld 2">
+            <a:extLst>
+              <a:ext uri="{FF2B5EF4-FFF2-40B4-BE49-F238E27FC236}">
+                <a16:creationId xmlns:a16="http://schemas.microsoft.com/office/drawing/2014/main" id="{D73F6482-C271-9900-A6BE-CD2C18C44796}"/>
+              </a:ext>
+            </a:extLst>
+          </p:cNvPr>
+          <p:cNvSpPr txBox="1"/>
+          <p:nvPr/>
+        </p:nvSpPr>
+        <p:spPr>
+          <a:xfrm>
+            <a:off x="405517" y="1163196"/>
+            <a:ext cx="7450372" cy="4247317"/>
+          </a:xfrm>
+          <a:prstGeom prst="rect">
+            <a:avLst/>
+          </a:prstGeom>
+          <a:solidFill>
+            <a:schemeClr val="bg1">
+              <a:lumMod val="75000"/>
+            </a:schemeClr>
+          </a:solidFill>
+        </p:spPr>
+        <p:txBody>
+          <a:bodyPr wrap="square" rtlCol="0">
+            <a:spAutoFit/>
+          </a:bodyPr>
+          <a:lstStyle/>
+          <a:p>
+            <a:r>
+              <a:rPr lang="en-US" dirty="0">
+                <a:solidFill>
+                  <a:schemeClr val="tx2">
+                    <a:lumMod val="75000"/>
+                  </a:schemeClr>
+                </a:solidFill>
+              </a:rPr>
+              <a:t>CONFIG.py:</a:t>
+            </a:r>
+          </a:p>
+          <a:p>
+            <a:r>
+              <a:rPr lang="en-US" dirty="0">
+                <a:solidFill>
+                  <a:schemeClr val="tx2">
+                    <a:lumMod val="75000"/>
+                  </a:schemeClr>
+                </a:solidFill>
+              </a:rPr>
+              <a:t>There are defined the ENTITIES</a:t>
+            </a:r>
+          </a:p>
+          <a:p>
+            <a:endParaRPr lang="en-US" dirty="0">
+              <a:solidFill>
+                <a:schemeClr val="tx2">
+                  <a:lumMod val="75000"/>
+                </a:schemeClr>
+              </a:solidFill>
+            </a:endParaRPr>
+          </a:p>
+          <a:p>
+            <a:r>
+              <a:rPr lang="en-US" dirty="0">
+                <a:solidFill>
+                  <a:schemeClr val="tx2">
+                    <a:lumMod val="75000"/>
+                  </a:schemeClr>
+                </a:solidFill>
+              </a:rPr>
+              <a:t>DEFINITIONS.py</a:t>
+            </a:r>
+          </a:p>
+          <a:p>
+            <a:r>
+              <a:rPr lang="en-US" dirty="0">
+                <a:solidFill>
+                  <a:schemeClr val="tx2">
+                    <a:lumMod val="75000"/>
+                  </a:schemeClr>
+                </a:solidFill>
+              </a:rPr>
+              <a:t>There are defined the possible random values</a:t>
+            </a:r>
+          </a:p>
+          <a:p>
+            <a:endParaRPr lang="en-US" dirty="0">
+              <a:solidFill>
+                <a:schemeClr val="tx2">
+                  <a:lumMod val="75000"/>
+                </a:schemeClr>
+              </a:solidFill>
+            </a:endParaRPr>
+          </a:p>
+          <a:p>
+            <a:r>
+              <a:rPr lang="en-US" dirty="0">
+                <a:solidFill>
+                  <a:schemeClr val="tx2">
+                    <a:lumMod val="75000"/>
+                  </a:schemeClr>
+                </a:solidFill>
+              </a:rPr>
+              <a:t>TEMPLATES.py</a:t>
+            </a:r>
+          </a:p>
+          <a:p>
+            <a:r>
+              <a:rPr lang="en-US" dirty="0">
+                <a:solidFill>
+                  <a:schemeClr val="tx2">
+                    <a:lumMod val="75000"/>
+                  </a:schemeClr>
+                </a:solidFill>
+              </a:rPr>
+              <a:t>There are defined the Template for synthetic medical report</a:t>
+            </a:r>
+          </a:p>
+          <a:p>
+            <a:endParaRPr lang="en-US" dirty="0">
+              <a:solidFill>
+                <a:schemeClr val="tx2">
+                  <a:lumMod val="75000"/>
+                </a:schemeClr>
+              </a:solidFill>
+            </a:endParaRPr>
+          </a:p>
+          <a:p>
+            <a:endParaRPr lang="en-US" dirty="0">
+              <a:solidFill>
+                <a:schemeClr val="tx2">
+                  <a:lumMod val="75000"/>
+                </a:schemeClr>
+              </a:solidFill>
+            </a:endParaRPr>
+          </a:p>
+          <a:p>
+            <a:r>
+              <a:rPr lang="en-US" dirty="0">
+                <a:solidFill>
+                  <a:schemeClr val="tx2">
+                    <a:lumMod val="75000"/>
+                  </a:schemeClr>
+                </a:solidFill>
+              </a:rPr>
+              <a:t>Trainings data:</a:t>
+            </a:r>
+          </a:p>
+          <a:p>
+            <a:endParaRPr lang="en-US" dirty="0">
+              <a:solidFill>
+                <a:schemeClr val="tx2">
+                  <a:lumMod val="75000"/>
+                </a:schemeClr>
+              </a:solidFill>
+            </a:endParaRPr>
+          </a:p>
+          <a:p>
+            <a:r>
+              <a:rPr lang="en-US" dirty="0">
+                <a:solidFill>
+                  <a:schemeClr val="tx2">
+                    <a:lumMod val="75000"/>
+                  </a:schemeClr>
+                </a:solidFill>
+              </a:rPr>
+              <a:t>1: from template</a:t>
+            </a:r>
+          </a:p>
+          <a:p>
+            <a:r>
+              <a:rPr lang="en-US" dirty="0">
+                <a:solidFill>
+                  <a:schemeClr val="tx2">
+                    <a:lumMod val="75000"/>
+                  </a:schemeClr>
+                </a:solidFill>
+              </a:rPr>
+              <a:t>2: from paraphrase</a:t>
+            </a:r>
+          </a:p>
+          <a:p>
+            <a:r>
+              <a:rPr lang="en-US" dirty="0">
+                <a:solidFill>
+                  <a:schemeClr val="tx2">
+                    <a:lumMod val="75000"/>
+                  </a:schemeClr>
+                </a:solidFill>
+              </a:rPr>
+              <a:t>we have used 50% random...</a:t>
+            </a:r>
+            <a:endParaRPr lang="de-DE" dirty="0">
+              <a:solidFill>
+                <a:schemeClr val="tx2">
+                  <a:lumMod val="75000"/>
+                </a:schemeClr>
+              </a:solidFill>
+            </a:endParaRPr>
+          </a:p>
+        </p:txBody>
+      </p:sp>
+    </p:spTree>
+    <p:extLst>
+      <p:ext uri="{BB962C8B-B14F-4D97-AF65-F5344CB8AC3E}">
+        <p14:creationId xmlns:p14="http://schemas.microsoft.com/office/powerpoint/2010/main" val="1274361470"/>
+      </p:ext>
+    </p:extLst>
+  </p:cSld>
+  <p:clrMapOvr>
+    <a:masterClrMapping/>
+  </p:clrMapOvr>
+</p:sld>
+</file>
+
+<file path=ppt/slides/slide6.xml><?xml version="1.0" encoding="utf-8"?>
 <p:sld xmlns:a="http://schemas.openxmlformats.org/drawingml/2006/main" xmlns:r="http://schemas.openxmlformats.org/officeDocument/2006/relationships" xmlns:p="http://schemas.openxmlformats.org/presentationml/2006/main">
   <p:cSld>
     <p:spTree>
@@ -5418,7 +5699,7 @@
 </p:sld>
 </file>
 
-<file path=ppt/slides/slide6.xml><?xml version="1.0" encoding="utf-8"?>
+<file path=ppt/slides/slide7.xml><?xml version="1.0" encoding="utf-8"?>
 <p:sld xmlns:a="http://schemas.openxmlformats.org/drawingml/2006/main" xmlns:r="http://schemas.openxmlformats.org/officeDocument/2006/relationships" xmlns:p="http://schemas.openxmlformats.org/presentationml/2006/main">
   <p:cSld>
     <p:spTree>
@@ -5886,7 +6167,7 @@
 </p:sld>
 </file>
 
-<file path=ppt/slides/slide7.xml><?xml version="1.0" encoding="utf-8"?>
+<file path=ppt/slides/slide8.xml><?xml version="1.0" encoding="utf-8"?>
 <p:sld xmlns:a="http://schemas.openxmlformats.org/drawingml/2006/main" xmlns:r="http://schemas.openxmlformats.org/officeDocument/2006/relationships" xmlns:p="http://schemas.openxmlformats.org/presentationml/2006/main">
   <p:cSld>
     <p:spTree>

--- a/documents/visual_abstract_NER.pptx
+++ b/documents/visual_abstract_NER.pptx
@@ -9,10 +9,11 @@
     <p:sldId id="260" r:id="rId3"/>
     <p:sldId id="261" r:id="rId4"/>
     <p:sldId id="262" r:id="rId5"/>
-    <p:sldId id="263" r:id="rId6"/>
-    <p:sldId id="257" r:id="rId7"/>
-    <p:sldId id="256" r:id="rId8"/>
-    <p:sldId id="259" r:id="rId9"/>
+    <p:sldId id="264" r:id="rId6"/>
+    <p:sldId id="263" r:id="rId7"/>
+    <p:sldId id="257" r:id="rId8"/>
+    <p:sldId id="256" r:id="rId9"/>
+    <p:sldId id="259" r:id="rId10"/>
   </p:sldIdLst>
   <p:sldSz cx="9144000" cy="6858000" type="screen4x3"/>
   <p:notesSz cx="6858000" cy="9144000"/>
@@ -309,7 +310,7 @@
           <a:p>
             <a:fld id="{5BCAD085-E8A6-8845-BD4E-CB4CCA059FC4}" type="datetimeFigureOut">
               <a:rPr lang="en-US" smtClean="0"/>
-              <a:t>3/23/2026</a:t>
+              <a:t>3/24/2026</a:t>
             </a:fld>
             <a:endParaRPr lang="en-US"/>
           </a:p>
@@ -477,7 +478,7 @@
           <a:p>
             <a:fld id="{5BCAD085-E8A6-8845-BD4E-CB4CCA059FC4}" type="datetimeFigureOut">
               <a:rPr lang="en-US" smtClean="0"/>
-              <a:t>3/23/2026</a:t>
+              <a:t>3/24/2026</a:t>
             </a:fld>
             <a:endParaRPr lang="en-US"/>
           </a:p>
@@ -655,7 +656,7 @@
           <a:p>
             <a:fld id="{5BCAD085-E8A6-8845-BD4E-CB4CCA059FC4}" type="datetimeFigureOut">
               <a:rPr lang="en-US" smtClean="0"/>
-              <a:t>3/23/2026</a:t>
+              <a:t>3/24/2026</a:t>
             </a:fld>
             <a:endParaRPr lang="en-US"/>
           </a:p>
@@ -823,7 +824,7 @@
           <a:p>
             <a:fld id="{5BCAD085-E8A6-8845-BD4E-CB4CCA059FC4}" type="datetimeFigureOut">
               <a:rPr lang="en-US" smtClean="0"/>
-              <a:t>3/23/2026</a:t>
+              <a:t>3/24/2026</a:t>
             </a:fld>
             <a:endParaRPr lang="en-US"/>
           </a:p>
@@ -1068,7 +1069,7 @@
           <a:p>
             <a:fld id="{5BCAD085-E8A6-8845-BD4E-CB4CCA059FC4}" type="datetimeFigureOut">
               <a:rPr lang="en-US" smtClean="0"/>
-              <a:t>3/23/2026</a:t>
+              <a:t>3/24/2026</a:t>
             </a:fld>
             <a:endParaRPr lang="en-US"/>
           </a:p>
@@ -1353,7 +1354,7 @@
           <a:p>
             <a:fld id="{5BCAD085-E8A6-8845-BD4E-CB4CCA059FC4}" type="datetimeFigureOut">
               <a:rPr lang="en-US" smtClean="0"/>
-              <a:t>3/23/2026</a:t>
+              <a:t>3/24/2026</a:t>
             </a:fld>
             <a:endParaRPr lang="en-US"/>
           </a:p>
@@ -1772,7 +1773,7 @@
           <a:p>
             <a:fld id="{5BCAD085-E8A6-8845-BD4E-CB4CCA059FC4}" type="datetimeFigureOut">
               <a:rPr lang="en-US" smtClean="0"/>
-              <a:t>3/23/2026</a:t>
+              <a:t>3/24/2026</a:t>
             </a:fld>
             <a:endParaRPr lang="en-US"/>
           </a:p>
@@ -1889,7 +1890,7 @@
           <a:p>
             <a:fld id="{5BCAD085-E8A6-8845-BD4E-CB4CCA059FC4}" type="datetimeFigureOut">
               <a:rPr lang="en-US" smtClean="0"/>
-              <a:t>3/23/2026</a:t>
+              <a:t>3/24/2026</a:t>
             </a:fld>
             <a:endParaRPr lang="en-US"/>
           </a:p>
@@ -1984,7 +1985,7 @@
           <a:p>
             <a:fld id="{5BCAD085-E8A6-8845-BD4E-CB4CCA059FC4}" type="datetimeFigureOut">
               <a:rPr lang="en-US" smtClean="0"/>
-              <a:t>3/23/2026</a:t>
+              <a:t>3/24/2026</a:t>
             </a:fld>
             <a:endParaRPr lang="en-US"/>
           </a:p>
@@ -2259,7 +2260,7 @@
           <a:p>
             <a:fld id="{5BCAD085-E8A6-8845-BD4E-CB4CCA059FC4}" type="datetimeFigureOut">
               <a:rPr lang="en-US" smtClean="0"/>
-              <a:t>3/23/2026</a:t>
+              <a:t>3/24/2026</a:t>
             </a:fld>
             <a:endParaRPr lang="en-US"/>
           </a:p>
@@ -2511,7 +2512,7 @@
           <a:p>
             <a:fld id="{5BCAD085-E8A6-8845-BD4E-CB4CCA059FC4}" type="datetimeFigureOut">
               <a:rPr lang="en-US" smtClean="0"/>
-              <a:t>3/23/2026</a:t>
+              <a:t>3/24/2026</a:t>
             </a:fld>
             <a:endParaRPr lang="en-US"/>
           </a:p>
@@ -2722,7 +2723,7 @@
           <a:p>
             <a:fld id="{5BCAD085-E8A6-8845-BD4E-CB4CCA059FC4}" type="datetimeFigureOut">
               <a:rPr lang="en-US" smtClean="0"/>
-              <a:t>3/23/2026</a:t>
+              <a:t>3/24/2026</a:t>
             </a:fld>
             <a:endParaRPr lang="en-US"/>
           </a:p>
@@ -3112,7 +3113,7 @@
         <p:spPr>
           <a:xfrm>
             <a:off x="316992" y="3528316"/>
-            <a:ext cx="8180832" cy="1200329"/>
+            <a:ext cx="8180832" cy="1077218"/>
           </a:xfrm>
           <a:prstGeom prst="rect">
             <a:avLst/>
@@ -3125,192 +3126,25 @@
           </a:bodyPr>
           <a:lstStyle/>
           <a:p>
-            <a:r>
-              <a:rPr lang="de-DE" b="1" dirty="0"/>
-              <a:t>MEXEGER</a:t>
-            </a:r>
-            <a:r>
-              <a:rPr lang="de-DE" dirty="0"/>
-              <a:t> </a:t>
-            </a:r>
-            <a:r>
-              <a:rPr lang="de-DE" dirty="0" err="1"/>
-              <a:t>serves</a:t>
-            </a:r>
-            <a:r>
-              <a:rPr lang="de-DE" dirty="0"/>
-              <a:t> </a:t>
-            </a:r>
-            <a:r>
-              <a:rPr lang="de-DE" dirty="0" err="1"/>
-              <a:t>as</a:t>
-            </a:r>
-            <a:r>
-              <a:rPr lang="de-DE" dirty="0"/>
-              <a:t> a high-</a:t>
-            </a:r>
-            <a:r>
-              <a:rPr lang="de-DE" dirty="0" err="1"/>
-              <a:t>precision</a:t>
-            </a:r>
-            <a:r>
-              <a:rPr lang="de-DE" dirty="0"/>
-              <a:t> </a:t>
-            </a:r>
-            <a:r>
-              <a:rPr lang="de-DE" dirty="0" err="1"/>
-              <a:t>bridge</a:t>
-            </a:r>
-            <a:r>
-              <a:rPr lang="de-DE" dirty="0"/>
-              <a:t> </a:t>
-            </a:r>
-            <a:r>
-              <a:rPr lang="de-DE" dirty="0" err="1"/>
-              <a:t>between</a:t>
-            </a:r>
-            <a:r>
-              <a:rPr lang="de-DE" dirty="0"/>
-              <a:t> </a:t>
-            </a:r>
-            <a:r>
-              <a:rPr lang="de-DE" dirty="0" err="1"/>
-              <a:t>unstructured</a:t>
-            </a:r>
-            <a:r>
-              <a:rPr lang="de-DE" dirty="0"/>
-              <a:t> </a:t>
-            </a:r>
-            <a:r>
-              <a:rPr lang="de-DE" dirty="0" err="1"/>
-              <a:t>clinical</a:t>
-            </a:r>
-            <a:r>
-              <a:rPr lang="de-DE" dirty="0"/>
-              <a:t> narratives and </a:t>
-            </a:r>
-            <a:r>
-              <a:rPr lang="de-DE" dirty="0" err="1"/>
-              <a:t>structured</a:t>
-            </a:r>
-            <a:r>
-              <a:rPr lang="de-DE" dirty="0"/>
-              <a:t>, </a:t>
-            </a:r>
-            <a:r>
-              <a:rPr lang="de-DE" dirty="0" err="1"/>
-              <a:t>actionable</a:t>
-            </a:r>
-            <a:r>
-              <a:rPr lang="de-DE" dirty="0"/>
-              <a:t> </a:t>
-            </a:r>
-            <a:r>
-              <a:rPr lang="de-DE" dirty="0" err="1"/>
-              <a:t>data</a:t>
-            </a:r>
-            <a:r>
-              <a:rPr lang="de-DE" dirty="0"/>
-              <a:t>. By </a:t>
-            </a:r>
-            <a:r>
-              <a:rPr lang="de-DE" dirty="0" err="1"/>
-              <a:t>leveraging</a:t>
-            </a:r>
-            <a:r>
-              <a:rPr lang="de-DE" dirty="0"/>
-              <a:t> a </a:t>
-            </a:r>
-            <a:r>
-              <a:rPr lang="de-DE" dirty="0" err="1"/>
-              <a:t>fine-tuned</a:t>
-            </a:r>
-            <a:r>
-              <a:rPr lang="de-DE" dirty="0"/>
-              <a:t> GBERT </a:t>
-            </a:r>
-            <a:r>
-              <a:rPr lang="de-DE" dirty="0" err="1"/>
-              <a:t>architecture</a:t>
-            </a:r>
-            <a:r>
-              <a:rPr lang="de-DE" dirty="0"/>
-              <a:t>, </a:t>
-            </a:r>
-            <a:r>
-              <a:rPr lang="de-DE" dirty="0" err="1"/>
-              <a:t>it</a:t>
-            </a:r>
-            <a:r>
-              <a:rPr lang="de-DE" dirty="0"/>
-              <a:t> </a:t>
-            </a:r>
-            <a:r>
-              <a:rPr lang="de-DE" dirty="0" err="1"/>
-              <a:t>transforms</a:t>
-            </a:r>
-            <a:r>
-              <a:rPr lang="de-DE" dirty="0"/>
-              <a:t> </a:t>
-            </a:r>
-            <a:r>
-              <a:rPr lang="de-DE" dirty="0" err="1"/>
-              <a:t>raw</a:t>
-            </a:r>
-            <a:r>
-              <a:rPr lang="de-DE" dirty="0"/>
-              <a:t> German </a:t>
-            </a:r>
-            <a:r>
-              <a:rPr lang="de-DE" dirty="0" err="1"/>
-              <a:t>medical</a:t>
-            </a:r>
-            <a:r>
-              <a:rPr lang="de-DE" dirty="0"/>
-              <a:t> </a:t>
-            </a:r>
-            <a:r>
-              <a:rPr lang="de-DE" dirty="0" err="1"/>
-              <a:t>text</a:t>
-            </a:r>
-            <a:r>
-              <a:rPr lang="de-DE" dirty="0"/>
-              <a:t> </a:t>
-            </a:r>
-            <a:r>
-              <a:rPr lang="de-DE" dirty="0" err="1"/>
-              <a:t>into</a:t>
-            </a:r>
-            <a:r>
-              <a:rPr lang="de-DE" dirty="0"/>
-              <a:t> </a:t>
-            </a:r>
-            <a:r>
-              <a:rPr lang="de-DE" dirty="0" err="1"/>
-              <a:t>standardized</a:t>
-            </a:r>
-            <a:r>
-              <a:rPr lang="de-DE" dirty="0"/>
-              <a:t>, interoperable </a:t>
-            </a:r>
-            <a:r>
-              <a:rPr lang="de-DE" dirty="0" err="1"/>
-              <a:t>assets</a:t>
-            </a:r>
-            <a:r>
-              <a:rPr lang="de-DE" dirty="0"/>
-              <a:t> (ICD-10, SNOMED CT, FHIR).</a:t>
-            </a:r>
-            <a:endParaRPr lang="en-US" dirty="0"/>
+            <a:pPr algn="ctr"/>
+            <a:r>
+              <a:rPr lang="en-US" sz="3200" dirty="0"/>
+              <a:t>A High-Precision Approach to Transforming Clinical Narratives into Structured Data</a:t>
+            </a:r>
+            <a:r>
+              <a:rPr lang="de-DE" sz="3200" dirty="0"/>
+              <a:t>. </a:t>
+            </a:r>
+            <a:endParaRPr lang="en-US" sz="3200" dirty="0"/>
           </a:p>
         </p:txBody>
       </p:sp>
       <p:pic>
         <p:nvPicPr>
-          <p:cNvPr id="8" name="Grafik 7">
+          <p:cNvPr id="3" name="Grafik 2" descr="Ein Bild, das Text, Schrift, Grafiken, Logo enthält.&#10;&#10;KI-generierte Inhalte können fehlerhaft sein.">
             <a:extLst>
               <a:ext uri="{FF2B5EF4-FFF2-40B4-BE49-F238E27FC236}">
-                <a16:creationId xmlns:a16="http://schemas.microsoft.com/office/drawing/2014/main" id="{60C520C7-4D84-8449-0658-E9D8518326CC}"/>
+                <a16:creationId xmlns:a16="http://schemas.microsoft.com/office/drawing/2014/main" id="{A7AA784A-8774-3D39-DC91-3A3A201CD118}"/>
               </a:ext>
             </a:extLst>
           </p:cNvPr>
@@ -3327,8 +3161,8 @@
         </p:blipFill>
         <p:spPr>
           <a:xfrm>
-            <a:off x="2573648" y="0"/>
-            <a:ext cx="3032022" cy="2345058"/>
+            <a:off x="2846829" y="208526"/>
+            <a:ext cx="3121158" cy="3121158"/>
           </a:xfrm>
           <a:prstGeom prst="rect">
             <a:avLst/>
@@ -3384,7 +3218,7 @@
         <p:spPr>
           <a:xfrm>
             <a:off x="0" y="-122650"/>
-            <a:ext cx="8229600" cy="1143000"/>
+            <a:ext cx="9144000" cy="1143000"/>
           </a:xfrm>
         </p:spPr>
         <p:txBody>
@@ -3440,8 +3274,8 @@
         </p:nvSpPr>
         <p:spPr>
           <a:xfrm>
-            <a:off x="5903818" y="855758"/>
-            <a:ext cx="3240182" cy="523220"/>
+            <a:off x="5568501" y="1228612"/>
+            <a:ext cx="4392613" cy="1015663"/>
           </a:xfrm>
           <a:prstGeom prst="rect">
             <a:avLst/>
@@ -3454,53 +3288,307 @@
           </a:bodyPr>
           <a:lstStyle/>
           <a:p>
-            <a:r>
-              <a:rPr lang="en-US" sz="1400" b="0" i="0" dirty="0">
-                <a:effectLst/>
+            <a:pPr marL="285750" indent="-285750">
+              <a:buFont typeface="Arial" panose="020B0604020202020204" pitchFamily="34" charset="0"/>
+              <a:buChar char="•"/>
+            </a:pPr>
+            <a:r>
+              <a:rPr lang="de-DE" sz="1200" dirty="0" err="1">
                 <a:latin typeface="+mj-lt"/>
               </a:rPr>
-              <a:t>In our project we have used </a:t>
-            </a:r>
-            <a:r>
-              <a:rPr lang="en-US" sz="1400" b="1" i="0" dirty="0">
-                <a:effectLst/>
+              <a:t>We</a:t>
+            </a:r>
+            <a:r>
+              <a:rPr lang="de-DE" sz="1200" dirty="0">
                 <a:latin typeface="+mj-lt"/>
               </a:rPr>
-              <a:t>Hugging-Face</a:t>
-            </a:r>
-          </a:p>
-          <a:p>
-            <a:r>
-              <a:rPr lang="en-US" sz="1400" b="0" i="0" dirty="0">
-                <a:effectLst/>
+              <a:t> </a:t>
+            </a:r>
+            <a:r>
+              <a:rPr lang="de-DE" sz="1200" dirty="0" err="1">
                 <a:latin typeface="+mj-lt"/>
               </a:rPr>
-              <a:t> with </a:t>
-            </a:r>
-            <a:r>
-              <a:rPr lang="en-US" sz="1400" b="1" i="0" dirty="0" err="1">
-                <a:effectLst/>
+              <a:t>use</a:t>
+            </a:r>
+            <a:r>
+              <a:rPr lang="de-DE" sz="1200" dirty="0">
                 <a:latin typeface="+mj-lt"/>
               </a:rPr>
-              <a:t>gbert</a:t>
-            </a:r>
-            <a:r>
-              <a:rPr lang="en-US" sz="1400" b="1" i="0" dirty="0">
-                <a:effectLst/>
+              <a:t> GBERT-base via </a:t>
+            </a:r>
+            <a:r>
+              <a:rPr lang="de-DE" sz="1200" dirty="0" err="1">
                 <a:latin typeface="+mj-lt"/>
               </a:rPr>
-              <a:t>-base</a:t>
-            </a:r>
-            <a:r>
-              <a:rPr lang="en-US" sz="1400" b="0" i="0" dirty="0">
-                <a:effectLst/>
+              <a:t>the</a:t>
+            </a:r>
+            <a:r>
+              <a:rPr lang="de-DE" sz="1200" dirty="0">
                 <a:latin typeface="+mj-lt"/>
               </a:rPr>
-              <a:t> for German language..</a:t>
-            </a:r>
-            <a:endParaRPr lang="de-DE" sz="1400" dirty="0">
+              <a:t> </a:t>
+            </a:r>
+            <a:r>
+              <a:rPr lang="de-DE" sz="1200" dirty="0" err="1">
+                <a:latin typeface="+mj-lt"/>
+              </a:rPr>
+              <a:t>Hugging</a:t>
+            </a:r>
+            <a:r>
+              <a:rPr lang="de-DE" sz="1200" dirty="0">
+                <a:latin typeface="+mj-lt"/>
+              </a:rPr>
+              <a:t> Face </a:t>
+            </a:r>
+            <a:r>
+              <a:rPr lang="de-DE" sz="1200" dirty="0" err="1">
+                <a:latin typeface="+mj-lt"/>
+              </a:rPr>
+              <a:t>framework</a:t>
+            </a:r>
+            <a:endParaRPr lang="de-DE" sz="1200" dirty="0">
               <a:latin typeface="+mj-lt"/>
             </a:endParaRPr>
+          </a:p>
+          <a:p>
+            <a:pPr marL="285750" indent="-285750">
+              <a:buFont typeface="Arial" panose="020B0604020202020204" pitchFamily="34" charset="0"/>
+              <a:buChar char="•"/>
+            </a:pPr>
+            <a:r>
+              <a:rPr lang="de-DE" sz="1200" dirty="0" err="1">
+                <a:latin typeface="+mj-lt"/>
+              </a:rPr>
+              <a:t>Pretrained</a:t>
+            </a:r>
+            <a:r>
+              <a:rPr lang="de-DE" sz="1200" dirty="0">
+                <a:latin typeface="+mj-lt"/>
+              </a:rPr>
+              <a:t> </a:t>
+            </a:r>
+            <a:r>
+              <a:rPr lang="de-DE" sz="1200" dirty="0" err="1">
+                <a:latin typeface="+mj-lt"/>
+              </a:rPr>
+              <a:t>transformer</a:t>
+            </a:r>
+            <a:r>
+              <a:rPr lang="de-DE" sz="1200" dirty="0">
+                <a:latin typeface="+mj-lt"/>
+              </a:rPr>
+              <a:t> </a:t>
+            </a:r>
+            <a:r>
+              <a:rPr lang="de-DE" sz="1200" dirty="0" err="1">
+                <a:latin typeface="+mj-lt"/>
+              </a:rPr>
+              <a:t>model</a:t>
+            </a:r>
+            <a:r>
+              <a:rPr lang="de-DE" sz="1200" dirty="0">
+                <a:latin typeface="+mj-lt"/>
+              </a:rPr>
+              <a:t> </a:t>
+            </a:r>
+            <a:r>
+              <a:rPr lang="de-DE" sz="1200" dirty="0" err="1">
+                <a:latin typeface="+mj-lt"/>
+              </a:rPr>
+              <a:t>for</a:t>
+            </a:r>
+            <a:r>
+              <a:rPr lang="de-DE" sz="1200" dirty="0">
+                <a:latin typeface="+mj-lt"/>
+              </a:rPr>
+              <a:t> German </a:t>
+            </a:r>
+            <a:r>
+              <a:rPr lang="de-DE" sz="1200" dirty="0" err="1">
+                <a:latin typeface="+mj-lt"/>
+              </a:rPr>
+              <a:t>language</a:t>
+            </a:r>
+            <a:r>
+              <a:rPr lang="de-DE" sz="1200" dirty="0">
+                <a:latin typeface="+mj-lt"/>
+              </a:rPr>
+              <a:t> </a:t>
+            </a:r>
+            <a:r>
+              <a:rPr lang="de-DE" sz="1200" dirty="0" err="1">
+                <a:latin typeface="+mj-lt"/>
+              </a:rPr>
+              <a:t>processing</a:t>
+            </a:r>
+            <a:endParaRPr lang="de-DE" sz="1200" dirty="0">
+              <a:latin typeface="+mj-lt"/>
+            </a:endParaRPr>
+          </a:p>
+          <a:p>
+            <a:pPr marL="285750" indent="-285750">
+              <a:buFont typeface="Arial" panose="020B0604020202020204" pitchFamily="34" charset="0"/>
+              <a:buChar char="•"/>
+            </a:pPr>
+            <a:r>
+              <a:rPr lang="de-DE" sz="1200" dirty="0">
+                <a:latin typeface="+mj-lt"/>
+              </a:rPr>
+              <a:t>Fine-</a:t>
+            </a:r>
+            <a:r>
+              <a:rPr lang="de-DE" sz="1200" dirty="0" err="1">
+                <a:latin typeface="+mj-lt"/>
+              </a:rPr>
+              <a:t>tuned</a:t>
+            </a:r>
+            <a:r>
+              <a:rPr lang="de-DE" sz="1200" dirty="0">
+                <a:latin typeface="+mj-lt"/>
+              </a:rPr>
+              <a:t> </a:t>
+            </a:r>
+            <a:r>
+              <a:rPr lang="de-DE" sz="1200" dirty="0" err="1">
+                <a:latin typeface="+mj-lt"/>
+              </a:rPr>
+              <a:t>for</a:t>
+            </a:r>
+            <a:r>
+              <a:rPr lang="de-DE" sz="1200" dirty="0">
+                <a:latin typeface="+mj-lt"/>
+              </a:rPr>
+              <a:t> </a:t>
+            </a:r>
+            <a:r>
+              <a:rPr lang="de-DE" sz="1200" dirty="0" err="1">
+                <a:latin typeface="+mj-lt"/>
+              </a:rPr>
+              <a:t>Named</a:t>
+            </a:r>
+            <a:r>
+              <a:rPr lang="de-DE" sz="1200" dirty="0">
+                <a:latin typeface="+mj-lt"/>
+              </a:rPr>
+              <a:t> Entity Recognition (NER) on </a:t>
+            </a:r>
+            <a:r>
+              <a:rPr lang="de-DE" sz="1200" dirty="0" err="1">
+                <a:latin typeface="+mj-lt"/>
+              </a:rPr>
+              <a:t>clinical</a:t>
+            </a:r>
+            <a:r>
+              <a:rPr lang="de-DE" sz="1200" dirty="0">
+                <a:latin typeface="+mj-lt"/>
+              </a:rPr>
+              <a:t> </a:t>
+            </a:r>
+            <a:r>
+              <a:rPr lang="de-DE" sz="1200" dirty="0" err="1">
+                <a:latin typeface="+mj-lt"/>
+              </a:rPr>
+              <a:t>text</a:t>
+            </a:r>
+            <a:endParaRPr lang="de-DE" sz="1200" dirty="0">
+              <a:latin typeface="+mj-lt"/>
+            </a:endParaRPr>
+          </a:p>
+          <a:p>
+            <a:pPr marL="285750" indent="-285750">
+              <a:buFont typeface="Arial" panose="020B0604020202020204" pitchFamily="34" charset="0"/>
+              <a:buChar char="•"/>
+            </a:pPr>
+            <a:r>
+              <a:rPr lang="de-DE" sz="1200" dirty="0">
+                <a:latin typeface="+mj-lt"/>
+              </a:rPr>
+              <a:t>Input: </a:t>
+            </a:r>
+            <a:r>
+              <a:rPr lang="de-DE" sz="1200" dirty="0" err="1">
+                <a:latin typeface="+mj-lt"/>
+              </a:rPr>
+              <a:t>clinical</a:t>
+            </a:r>
+            <a:r>
+              <a:rPr lang="de-DE" sz="1200" dirty="0">
+                <a:latin typeface="+mj-lt"/>
+              </a:rPr>
+              <a:t> narratives</a:t>
+            </a:r>
+          </a:p>
+          <a:p>
+            <a:pPr marL="285750" indent="-285750">
+              <a:buFont typeface="Arial" panose="020B0604020202020204" pitchFamily="34" charset="0"/>
+              <a:buChar char="•"/>
+            </a:pPr>
+            <a:r>
+              <a:rPr lang="de-DE" sz="1200" dirty="0">
+                <a:latin typeface="+mj-lt"/>
+              </a:rPr>
+              <a:t>Output: </a:t>
+            </a:r>
+            <a:r>
+              <a:rPr lang="de-DE" sz="1200" dirty="0" err="1">
+                <a:latin typeface="+mj-lt"/>
+              </a:rPr>
+              <a:t>structured</a:t>
+            </a:r>
+            <a:r>
+              <a:rPr lang="de-DE" sz="1200" dirty="0">
+                <a:latin typeface="+mj-lt"/>
+              </a:rPr>
+              <a:t> </a:t>
+            </a:r>
+            <a:r>
+              <a:rPr lang="de-DE" sz="1200" dirty="0" err="1">
+                <a:latin typeface="+mj-lt"/>
+              </a:rPr>
+              <a:t>entities</a:t>
+            </a:r>
+            <a:r>
+              <a:rPr lang="de-DE" sz="1200" dirty="0">
+                <a:latin typeface="+mj-lt"/>
+              </a:rPr>
+              <a:t> (e.g., </a:t>
+            </a:r>
+            <a:r>
+              <a:rPr lang="de-DE" sz="1200" dirty="0" err="1">
+                <a:latin typeface="+mj-lt"/>
+              </a:rPr>
+              <a:t>diagnoses</a:t>
+            </a:r>
+            <a:r>
+              <a:rPr lang="de-DE" sz="1200" dirty="0">
+                <a:latin typeface="+mj-lt"/>
+              </a:rPr>
+              <a:t>, </a:t>
+            </a:r>
+            <a:r>
+              <a:rPr lang="de-DE" sz="1200" dirty="0" err="1">
+                <a:latin typeface="+mj-lt"/>
+              </a:rPr>
+              <a:t>symptoms</a:t>
+            </a:r>
+            <a:r>
+              <a:rPr lang="de-DE" sz="1200" dirty="0">
+                <a:latin typeface="+mj-lt"/>
+              </a:rPr>
+              <a:t>, </a:t>
+            </a:r>
+            <a:r>
+              <a:rPr lang="de-DE" sz="1200" dirty="0" err="1">
+                <a:latin typeface="+mj-lt"/>
+              </a:rPr>
+              <a:t>dates</a:t>
+            </a:r>
+            <a:r>
+              <a:rPr lang="de-DE" sz="1200" dirty="0">
+                <a:latin typeface="+mj-lt"/>
+              </a:rPr>
+              <a:t>)</a:t>
+            </a:r>
           </a:p>
         </p:txBody>
       </p:sp>
@@ -3624,7 +3712,7 @@
         </p:blipFill>
         <p:spPr>
           <a:xfrm>
-            <a:off x="172057" y="1282209"/>
+            <a:off x="172057" y="2374634"/>
             <a:ext cx="7678222" cy="3391373"/>
           </a:xfrm>
           <a:prstGeom prst="rect">
@@ -3632,6 +3720,66 @@
           </a:prstGeom>
         </p:spPr>
       </p:pic>
+      <p:sp>
+        <p:nvSpPr>
+          <p:cNvPr id="5" name="Textfeld 4">
+            <a:extLst>
+              <a:ext uri="{FF2B5EF4-FFF2-40B4-BE49-F238E27FC236}">
+                <a16:creationId xmlns:a16="http://schemas.microsoft.com/office/drawing/2014/main" id="{AF640D37-6063-431F-BC75-948A29FD7949}"/>
+              </a:ext>
+            </a:extLst>
+          </p:cNvPr>
+          <p:cNvSpPr txBox="1"/>
+          <p:nvPr/>
+        </p:nvSpPr>
+        <p:spPr>
+          <a:xfrm>
+            <a:off x="4978391" y="1229949"/>
+            <a:ext cx="3871573" cy="923330"/>
+          </a:xfrm>
+          <a:prstGeom prst="rect">
+            <a:avLst/>
+          </a:prstGeom>
+          <a:noFill/>
+        </p:spPr>
+        <p:txBody>
+          <a:bodyPr wrap="none" rtlCol="0">
+            <a:spAutoFit/>
+          </a:bodyPr>
+          <a:lstStyle/>
+          <a:p>
+            <a:pPr marL="285750" indent="-285750">
+              <a:buFont typeface="Arial" panose="020B0604020202020204" pitchFamily="34" charset="0"/>
+              <a:buChar char="•"/>
+            </a:pPr>
+            <a:r>
+              <a:rPr lang="en-US" dirty="0"/>
+              <a:t>10000 synthetic samples</a:t>
+            </a:r>
+          </a:p>
+          <a:p>
+            <a:pPr marL="285750" indent="-285750">
+              <a:buFont typeface="Arial" panose="020B0604020202020204" pitchFamily="34" charset="0"/>
+              <a:buChar char="•"/>
+            </a:pPr>
+            <a:r>
+              <a:rPr lang="en-US" dirty="0"/>
+              <a:t>Template-based + paraphrased data</a:t>
+            </a:r>
+          </a:p>
+          <a:p>
+            <a:pPr marL="285750" indent="-285750">
+              <a:buFont typeface="Arial" panose="020B0604020202020204" pitchFamily="34" charset="0"/>
+              <a:buChar char="•"/>
+            </a:pPr>
+            <a:r>
+              <a:rPr lang="en-US" dirty="0"/>
+              <a:t>BIO-annotated for NER training</a:t>
+            </a:r>
+            <a:endParaRPr lang="de-DE" dirty="0"/>
+          </a:p>
+        </p:txBody>
+      </p:sp>
     </p:spTree>
     <p:extLst>
       <p:ext uri="{BB962C8B-B14F-4D97-AF65-F5344CB8AC3E}">
@@ -3681,7 +3829,7 @@
         <p:spPr>
           <a:xfrm>
             <a:off x="0" y="6414"/>
-            <a:ext cx="8229600" cy="1143000"/>
+            <a:ext cx="8229600" cy="796668"/>
           </a:xfrm>
         </p:spPr>
         <p:txBody>
@@ -3690,7 +3838,7 @@
           <a:p>
             <a:r>
               <a:rPr lang="de-DE" dirty="0"/>
-              <a:t>INFERENCE</a:t>
+              <a:t>INFERENCE/PREDICTIONS</a:t>
             </a:r>
           </a:p>
         </p:txBody>
@@ -3725,6 +3873,56 @@
           </a:prstGeom>
         </p:spPr>
       </p:pic>
+      <p:sp>
+        <p:nvSpPr>
+          <p:cNvPr id="5" name="Textfeld 4">
+            <a:extLst>
+              <a:ext uri="{FF2B5EF4-FFF2-40B4-BE49-F238E27FC236}">
+                <a16:creationId xmlns:a16="http://schemas.microsoft.com/office/drawing/2014/main" id="{631153ED-A49C-08A4-44B4-F2312C9A64DF}"/>
+              </a:ext>
+            </a:extLst>
+          </p:cNvPr>
+          <p:cNvSpPr txBox="1"/>
+          <p:nvPr/>
+        </p:nvSpPr>
+        <p:spPr>
+          <a:xfrm>
+            <a:off x="5551135" y="1817806"/>
+            <a:ext cx="2990242" cy="646331"/>
+          </a:xfrm>
+          <a:prstGeom prst="rect">
+            <a:avLst/>
+          </a:prstGeom>
+          <a:noFill/>
+        </p:spPr>
+        <p:txBody>
+          <a:bodyPr wrap="none" rtlCol="0">
+            <a:spAutoFit/>
+          </a:bodyPr>
+          <a:lstStyle/>
+          <a:p>
+            <a:pPr marL="285750" indent="-285750">
+              <a:buFont typeface="Arial" panose="020B0604020202020204" pitchFamily="34" charset="0"/>
+              <a:buChar char="•"/>
+            </a:pPr>
+            <a:r>
+              <a:rPr lang="en-US" dirty="0"/>
+              <a:t>Input: clinical text</a:t>
+            </a:r>
+          </a:p>
+          <a:p>
+            <a:pPr marL="285750" indent="-285750">
+              <a:buFont typeface="Arial" panose="020B0604020202020204" pitchFamily="34" charset="0"/>
+              <a:buChar char="•"/>
+            </a:pPr>
+            <a:r>
+              <a:rPr lang="en-US" dirty="0"/>
+              <a:t>Output: structured entities</a:t>
+            </a:r>
+            <a:endParaRPr lang="de-DE" dirty="0"/>
+          </a:p>
+        </p:txBody>
+      </p:sp>
     </p:spTree>
     <p:extLst>
       <p:ext uri="{BB962C8B-B14F-4D97-AF65-F5344CB8AC3E}">
@@ -3760,7 +3958,7 @@
           <p:cNvPr id="2" name="Titel 1">
             <a:extLst>
               <a:ext uri="{FF2B5EF4-FFF2-40B4-BE49-F238E27FC236}">
-                <a16:creationId xmlns:a16="http://schemas.microsoft.com/office/drawing/2014/main" id="{61658E02-7D76-13D4-8CD7-15DC687AADCB}"/>
+                <a16:creationId xmlns:a16="http://schemas.microsoft.com/office/drawing/2014/main" id="{760B810D-EC76-1790-730B-44C59BFB66C1}"/>
               </a:ext>
             </a:extLst>
           </p:cNvPr>
@@ -3771,31 +3969,14 @@
             <p:ph type="title"/>
           </p:nvPr>
         </p:nvSpPr>
-        <p:spPr>
-          <a:xfrm>
-            <a:off x="0" y="20196"/>
-            <a:ext cx="8229600" cy="1143000"/>
-          </a:xfrm>
-        </p:spPr>
+        <p:spPr/>
         <p:txBody>
           <a:bodyPr/>
           <a:lstStyle/>
           <a:p>
             <a:r>
-              <a:rPr lang="de-DE" dirty="0" err="1"/>
-              <a:t>Let‘s</a:t>
-            </a:r>
-            <a:r>
               <a:rPr lang="de-DE" dirty="0"/>
-              <a:t> </a:t>
-            </a:r>
-            <a:r>
-              <a:rPr lang="de-DE" dirty="0" err="1"/>
-              <a:t>start</a:t>
-            </a:r>
-            <a:r>
-              <a:rPr lang="de-DE" dirty="0"/>
-              <a:t>…</a:t>
+              <a:t>Future Work</a:t>
             </a:r>
           </a:p>
         </p:txBody>
@@ -3805,7 +3986,7 @@
           <p:cNvPr id="3" name="Textfeld 2">
             <a:extLst>
               <a:ext uri="{FF2B5EF4-FFF2-40B4-BE49-F238E27FC236}">
-                <a16:creationId xmlns:a16="http://schemas.microsoft.com/office/drawing/2014/main" id="{D73F6482-C271-9900-A6BE-CD2C18C44796}"/>
+                <a16:creationId xmlns:a16="http://schemas.microsoft.com/office/drawing/2014/main" id="{877A0336-AD84-3662-57B4-6760DA1653A1}"/>
               </a:ext>
             </a:extLst>
           </p:cNvPr>
@@ -3814,201 +3995,97 @@
         </p:nvSpPr>
         <p:spPr>
           <a:xfrm>
-            <a:off x="405517" y="1163196"/>
-            <a:ext cx="7450372" cy="4247317"/>
+            <a:off x="1574359" y="1987826"/>
+            <a:ext cx="5805948" cy="923330"/>
           </a:xfrm>
           <a:prstGeom prst="rect">
             <a:avLst/>
           </a:prstGeom>
-          <a:solidFill>
-            <a:schemeClr val="bg1">
-              <a:lumMod val="75000"/>
-            </a:schemeClr>
-          </a:solidFill>
+          <a:noFill/>
         </p:spPr>
         <p:txBody>
-          <a:bodyPr wrap="square" rtlCol="0">
+          <a:bodyPr wrap="none" rtlCol="0">
             <a:spAutoFit/>
           </a:bodyPr>
           <a:lstStyle/>
           <a:p>
-            <a:r>
-              <a:rPr lang="en-US" dirty="0">
-                <a:solidFill>
-                  <a:schemeClr val="tx2">
-                    <a:lumMod val="75000"/>
-                  </a:schemeClr>
-                </a:solidFill>
-              </a:rPr>
-              <a:t>CONFIG.py:</a:t>
-            </a:r>
-          </a:p>
-          <a:p>
-            <a:r>
-              <a:rPr lang="en-US" dirty="0">
-                <a:solidFill>
-                  <a:schemeClr val="tx2">
-                    <a:lumMod val="75000"/>
-                  </a:schemeClr>
-                </a:solidFill>
-              </a:rPr>
-              <a:t>There are defined the ENTITIES</a:t>
-            </a:r>
-          </a:p>
-          <a:p>
-            <a:endParaRPr lang="en-US" dirty="0">
-              <a:solidFill>
-                <a:schemeClr val="tx2">
-                  <a:lumMod val="75000"/>
-                </a:schemeClr>
-              </a:solidFill>
-            </a:endParaRPr>
-          </a:p>
-          <a:p>
-            <a:r>
-              <a:rPr lang="en-US" dirty="0">
-                <a:solidFill>
-                  <a:schemeClr val="tx2">
-                    <a:lumMod val="75000"/>
-                  </a:schemeClr>
-                </a:solidFill>
-              </a:rPr>
-              <a:t>DEFINITIONS.py</a:t>
-            </a:r>
-          </a:p>
-          <a:p>
-            <a:r>
-              <a:rPr lang="en-US" dirty="0">
-                <a:solidFill>
-                  <a:schemeClr val="tx2">
-                    <a:lumMod val="75000"/>
-                  </a:schemeClr>
-                </a:solidFill>
-              </a:rPr>
-              <a:t>There are defined the possible random values</a:t>
-            </a:r>
-          </a:p>
-          <a:p>
-            <a:endParaRPr lang="en-US" dirty="0">
-              <a:solidFill>
-                <a:schemeClr val="tx2">
-                  <a:lumMod val="75000"/>
-                </a:schemeClr>
-              </a:solidFill>
-            </a:endParaRPr>
-          </a:p>
-          <a:p>
-            <a:r>
-              <a:rPr lang="en-US" dirty="0">
-                <a:solidFill>
-                  <a:schemeClr val="tx2">
-                    <a:lumMod val="75000"/>
-                  </a:schemeClr>
-                </a:solidFill>
-              </a:rPr>
-              <a:t>TEMPLATES.py</a:t>
-            </a:r>
-          </a:p>
-          <a:p>
-            <a:r>
-              <a:rPr lang="en-US" dirty="0">
-                <a:solidFill>
-                  <a:schemeClr val="tx2">
-                    <a:lumMod val="75000"/>
-                  </a:schemeClr>
-                </a:solidFill>
-              </a:rPr>
-              <a:t>There are defined the Template for synthetic medical report</a:t>
-            </a:r>
-          </a:p>
-          <a:p>
-            <a:endParaRPr lang="en-US" dirty="0">
-              <a:solidFill>
-                <a:schemeClr val="tx2">
-                  <a:lumMod val="75000"/>
-                </a:schemeClr>
-              </a:solidFill>
-            </a:endParaRPr>
-          </a:p>
-          <a:p>
-            <a:endParaRPr lang="en-US" dirty="0">
-              <a:solidFill>
-                <a:schemeClr val="tx2">
-                  <a:lumMod val="75000"/>
-                </a:schemeClr>
-              </a:solidFill>
-            </a:endParaRPr>
-          </a:p>
-          <a:p>
-            <a:r>
-              <a:rPr lang="en-US" dirty="0">
-                <a:solidFill>
-                  <a:schemeClr val="tx2">
-                    <a:lumMod val="75000"/>
-                  </a:schemeClr>
-                </a:solidFill>
-              </a:rPr>
-              <a:t>Trainings data:</a:t>
-            </a:r>
-          </a:p>
-          <a:p>
-            <a:endParaRPr lang="en-US" dirty="0">
-              <a:solidFill>
-                <a:schemeClr val="tx2">
-                  <a:lumMod val="75000"/>
-                </a:schemeClr>
-              </a:solidFill>
-            </a:endParaRPr>
-          </a:p>
-          <a:p>
-            <a:r>
-              <a:rPr lang="en-US" dirty="0">
-                <a:solidFill>
-                  <a:schemeClr val="tx2">
-                    <a:lumMod val="75000"/>
-                  </a:schemeClr>
-                </a:solidFill>
-              </a:rPr>
-              <a:t>1: from template</a:t>
-            </a:r>
-          </a:p>
-          <a:p>
-            <a:r>
-              <a:rPr lang="en-US" dirty="0">
-                <a:solidFill>
-                  <a:schemeClr val="tx2">
-                    <a:lumMod val="75000"/>
-                  </a:schemeClr>
-                </a:solidFill>
-              </a:rPr>
-              <a:t>2: from paraphrase</a:t>
-            </a:r>
-          </a:p>
-          <a:p>
-            <a:r>
-              <a:rPr lang="en-US" dirty="0">
-                <a:solidFill>
-                  <a:schemeClr val="tx2">
-                    <a:lumMod val="75000"/>
-                  </a:schemeClr>
-                </a:solidFill>
-              </a:rPr>
-              <a:t>we have used 50% random...</a:t>
-            </a:r>
-            <a:endParaRPr lang="de-DE" dirty="0">
-              <a:solidFill>
-                <a:schemeClr val="tx2">
-                  <a:lumMod val="75000"/>
-                </a:schemeClr>
-              </a:solidFill>
-            </a:endParaRPr>
+            <a:pPr marL="285750" indent="-285750">
+              <a:buFont typeface="Arial" panose="020B0604020202020204" pitchFamily="34" charset="0"/>
+              <a:buChar char="•"/>
+            </a:pPr>
+            <a:r>
+              <a:rPr lang="de-DE" dirty="0"/>
+              <a:t>Multilingual support via </a:t>
+            </a:r>
+            <a:r>
+              <a:rPr lang="de-DE" dirty="0" err="1"/>
+              <a:t>translation</a:t>
+            </a:r>
+            <a:r>
+              <a:rPr lang="de-DE" dirty="0"/>
+              <a:t> (</a:t>
+            </a:r>
+            <a:r>
+              <a:rPr lang="de-DE" dirty="0" err="1"/>
+              <a:t>MarianMT</a:t>
+            </a:r>
+            <a:r>
+              <a:rPr lang="de-DE" dirty="0"/>
+              <a:t> / Google)</a:t>
+            </a:r>
+          </a:p>
+          <a:p>
+            <a:pPr marL="285750" indent="-285750">
+              <a:buFont typeface="Arial" panose="020B0604020202020204" pitchFamily="34" charset="0"/>
+              <a:buChar char="•"/>
+            </a:pPr>
+            <a:r>
+              <a:rPr lang="de-DE" dirty="0"/>
+              <a:t>Mapping </a:t>
+            </a:r>
+            <a:r>
+              <a:rPr lang="de-DE" dirty="0" err="1"/>
+              <a:t>to</a:t>
+            </a:r>
+            <a:r>
+              <a:rPr lang="de-DE" dirty="0"/>
+              <a:t> HL7 FHIR </a:t>
+            </a:r>
+            <a:r>
+              <a:rPr lang="de-DE" dirty="0" err="1"/>
+              <a:t>resources</a:t>
+            </a:r>
+            <a:endParaRPr lang="de-DE" dirty="0"/>
+          </a:p>
+          <a:p>
+            <a:pPr marL="285750" indent="-285750">
+              <a:buFont typeface="Arial" panose="020B0604020202020204" pitchFamily="34" charset="0"/>
+              <a:buChar char="•"/>
+            </a:pPr>
+            <a:r>
+              <a:rPr lang="de-DE" dirty="0"/>
+              <a:t>Validation on a real </a:t>
+            </a:r>
+            <a:r>
+              <a:rPr lang="de-DE" dirty="0" err="1"/>
+              <a:t>clinical</a:t>
+            </a:r>
+            <a:r>
+              <a:rPr lang="de-DE" dirty="0"/>
+              <a:t> </a:t>
+            </a:r>
+            <a:r>
+              <a:rPr lang="de-DE" dirty="0" err="1"/>
+              <a:t>datasets</a:t>
+            </a:r>
+            <a:endParaRPr lang="de-DE" dirty="0"/>
           </a:p>
         </p:txBody>
       </p:sp>
     </p:spTree>
     <p:extLst>
       <p:ext uri="{BB962C8B-B14F-4D97-AF65-F5344CB8AC3E}">
-        <p14:creationId xmlns:p14="http://schemas.microsoft.com/office/powerpoint/2010/main" val="1274361470"/>
+        <p14:creationId xmlns:p14="http://schemas.microsoft.com/office/powerpoint/2010/main" val="1947111068"/>
       </p:ext>
     </p:extLst>
   </p:cSld>
@@ -4037,7 +4114,13 @@
       </p:grpSpPr>
       <p:sp>
         <p:nvSpPr>
-          <p:cNvPr id="3" name="Title 1"/>
+          <p:cNvPr id="2" name="Titel 1">
+            <a:extLst>
+              <a:ext uri="{FF2B5EF4-FFF2-40B4-BE49-F238E27FC236}">
+                <a16:creationId xmlns:a16="http://schemas.microsoft.com/office/drawing/2014/main" id="{61658E02-7D76-13D4-8CD7-15DC687AADCB}"/>
+              </a:ext>
+            </a:extLst>
+          </p:cNvPr>
           <p:cNvSpPr>
             <a:spLocks noGrp="1"/>
           </p:cNvSpPr>
@@ -4047,35 +4130,268 @@
         </p:nvSpPr>
         <p:spPr>
           <a:xfrm>
-            <a:off x="61993" y="127407"/>
-            <a:ext cx="8834034" cy="1143000"/>
+            <a:off x="0" y="20196"/>
+            <a:ext cx="8229600" cy="1143000"/>
           </a:xfrm>
         </p:spPr>
         <p:txBody>
-          <a:bodyPr>
-            <a:normAutofit/>
+          <a:bodyPr/>
+          <a:lstStyle/>
+          <a:p>
+            <a:r>
+              <a:rPr lang="de-DE" dirty="0" err="1"/>
+              <a:t>Let‘s</a:t>
+            </a:r>
+            <a:r>
+              <a:rPr lang="de-DE" dirty="0"/>
+              <a:t> </a:t>
+            </a:r>
+            <a:r>
+              <a:rPr lang="de-DE" dirty="0" err="1"/>
+              <a:t>start</a:t>
+            </a:r>
+            <a:r>
+              <a:rPr lang="de-DE" dirty="0"/>
+              <a:t>…</a:t>
+            </a:r>
+          </a:p>
+        </p:txBody>
+      </p:sp>
+      <p:sp>
+        <p:nvSpPr>
+          <p:cNvPr id="3" name="Textfeld 2">
+            <a:extLst>
+              <a:ext uri="{FF2B5EF4-FFF2-40B4-BE49-F238E27FC236}">
+                <a16:creationId xmlns:a16="http://schemas.microsoft.com/office/drawing/2014/main" id="{D73F6482-C271-9900-A6BE-CD2C18C44796}"/>
+              </a:ext>
+            </a:extLst>
+          </p:cNvPr>
+          <p:cNvSpPr txBox="1"/>
+          <p:nvPr/>
+        </p:nvSpPr>
+        <p:spPr>
+          <a:xfrm>
+            <a:off x="405517" y="1163196"/>
+            <a:ext cx="7450372" cy="4247317"/>
+          </a:xfrm>
+          <a:prstGeom prst="rect">
+            <a:avLst/>
+          </a:prstGeom>
+          <a:solidFill>
+            <a:schemeClr val="bg1">
+              <a:lumMod val="75000"/>
+            </a:schemeClr>
+          </a:solidFill>
+        </p:spPr>
+        <p:txBody>
+          <a:bodyPr wrap="square" rtlCol="0">
+            <a:spAutoFit/>
           </a:bodyPr>
           <a:lstStyle/>
           <a:p>
-            <a:pPr>
-              <a:defRPr sz="3200" b="1"/>
-            </a:pPr>
-            <a:r>
-              <a:rPr lang="de-DE" sz="2800" dirty="0">
-                <a:solidFill>
-                  <a:srgbClr val="063A5A"/>
-                </a:solidFill>
-              </a:rPr>
-              <a:t>MEXGER WORKFLOW</a:t>
-            </a:r>
-            <a:endParaRPr sz="2800" dirty="0">
+            <a:r>
+              <a:rPr lang="en-US" dirty="0">
+                <a:solidFill>
+                  <a:schemeClr val="tx2">
+                    <a:lumMod val="75000"/>
+                  </a:schemeClr>
+                </a:solidFill>
+              </a:rPr>
+              <a:t>CONFIG.py:</a:t>
+            </a:r>
+          </a:p>
+          <a:p>
+            <a:r>
+              <a:rPr lang="en-US" dirty="0">
+                <a:solidFill>
+                  <a:schemeClr val="tx2">
+                    <a:lumMod val="75000"/>
+                  </a:schemeClr>
+                </a:solidFill>
+              </a:rPr>
+              <a:t>There are defined the ENTITIES</a:t>
+            </a:r>
+          </a:p>
+          <a:p>
+            <a:endParaRPr lang="en-US" dirty="0">
               <a:solidFill>
-                <a:srgbClr val="063A5A"/>
+                <a:schemeClr val="tx2">
+                  <a:lumMod val="75000"/>
+                </a:schemeClr>
               </a:solidFill>
             </a:endParaRPr>
           </a:p>
-        </p:txBody>
-      </p:sp>
+          <a:p>
+            <a:r>
+              <a:rPr lang="en-US" dirty="0">
+                <a:solidFill>
+                  <a:schemeClr val="tx2">
+                    <a:lumMod val="75000"/>
+                  </a:schemeClr>
+                </a:solidFill>
+              </a:rPr>
+              <a:t>DEFINITIONS.py</a:t>
+            </a:r>
+          </a:p>
+          <a:p>
+            <a:r>
+              <a:rPr lang="en-US" dirty="0">
+                <a:solidFill>
+                  <a:schemeClr val="tx2">
+                    <a:lumMod val="75000"/>
+                  </a:schemeClr>
+                </a:solidFill>
+              </a:rPr>
+              <a:t>There are defined the possible random values</a:t>
+            </a:r>
+          </a:p>
+          <a:p>
+            <a:endParaRPr lang="en-US" dirty="0">
+              <a:solidFill>
+                <a:schemeClr val="tx2">
+                  <a:lumMod val="75000"/>
+                </a:schemeClr>
+              </a:solidFill>
+            </a:endParaRPr>
+          </a:p>
+          <a:p>
+            <a:r>
+              <a:rPr lang="en-US" dirty="0">
+                <a:solidFill>
+                  <a:schemeClr val="tx2">
+                    <a:lumMod val="75000"/>
+                  </a:schemeClr>
+                </a:solidFill>
+              </a:rPr>
+              <a:t>TEMPLATES.py</a:t>
+            </a:r>
+          </a:p>
+          <a:p>
+            <a:r>
+              <a:rPr lang="en-US" dirty="0">
+                <a:solidFill>
+                  <a:schemeClr val="tx2">
+                    <a:lumMod val="75000"/>
+                  </a:schemeClr>
+                </a:solidFill>
+              </a:rPr>
+              <a:t>There are defined the Template for synthetic medical report</a:t>
+            </a:r>
+          </a:p>
+          <a:p>
+            <a:endParaRPr lang="en-US" dirty="0">
+              <a:solidFill>
+                <a:schemeClr val="tx2">
+                  <a:lumMod val="75000"/>
+                </a:schemeClr>
+              </a:solidFill>
+            </a:endParaRPr>
+          </a:p>
+          <a:p>
+            <a:endParaRPr lang="en-US" dirty="0">
+              <a:solidFill>
+                <a:schemeClr val="tx2">
+                  <a:lumMod val="75000"/>
+                </a:schemeClr>
+              </a:solidFill>
+            </a:endParaRPr>
+          </a:p>
+          <a:p>
+            <a:r>
+              <a:rPr lang="en-US" dirty="0">
+                <a:solidFill>
+                  <a:schemeClr val="tx2">
+                    <a:lumMod val="75000"/>
+                  </a:schemeClr>
+                </a:solidFill>
+              </a:rPr>
+              <a:t>Trainings data:</a:t>
+            </a:r>
+          </a:p>
+          <a:p>
+            <a:endParaRPr lang="en-US" dirty="0">
+              <a:solidFill>
+                <a:schemeClr val="tx2">
+                  <a:lumMod val="75000"/>
+                </a:schemeClr>
+              </a:solidFill>
+            </a:endParaRPr>
+          </a:p>
+          <a:p>
+            <a:r>
+              <a:rPr lang="en-US" dirty="0">
+                <a:solidFill>
+                  <a:schemeClr val="tx2">
+                    <a:lumMod val="75000"/>
+                  </a:schemeClr>
+                </a:solidFill>
+              </a:rPr>
+              <a:t>1: from template</a:t>
+            </a:r>
+          </a:p>
+          <a:p>
+            <a:r>
+              <a:rPr lang="en-US" dirty="0">
+                <a:solidFill>
+                  <a:schemeClr val="tx2">
+                    <a:lumMod val="75000"/>
+                  </a:schemeClr>
+                </a:solidFill>
+              </a:rPr>
+              <a:t>2: from paraphrase</a:t>
+            </a:r>
+          </a:p>
+          <a:p>
+            <a:r>
+              <a:rPr lang="en-US" dirty="0">
+                <a:solidFill>
+                  <a:schemeClr val="tx2">
+                    <a:lumMod val="75000"/>
+                  </a:schemeClr>
+                </a:solidFill>
+              </a:rPr>
+              <a:t>we have used 50% random...</a:t>
+            </a:r>
+            <a:endParaRPr lang="de-DE" dirty="0">
+              <a:solidFill>
+                <a:schemeClr val="tx2">
+                  <a:lumMod val="75000"/>
+                </a:schemeClr>
+              </a:solidFill>
+            </a:endParaRPr>
+          </a:p>
+        </p:txBody>
+      </p:sp>
+    </p:spTree>
+    <p:extLst>
+      <p:ext uri="{BB962C8B-B14F-4D97-AF65-F5344CB8AC3E}">
+        <p14:creationId xmlns:p14="http://schemas.microsoft.com/office/powerpoint/2010/main" val="1274361470"/>
+      </p:ext>
+    </p:extLst>
+  </p:cSld>
+  <p:clrMapOvr>
+    <a:masterClrMapping/>
+  </p:clrMapOvr>
+</p:sld>
+</file>
+
+<file path=ppt/slides/slide7.xml><?xml version="1.0" encoding="utf-8"?>
+<p:sld xmlns:a="http://schemas.openxmlformats.org/drawingml/2006/main" xmlns:r="http://schemas.openxmlformats.org/officeDocument/2006/relationships" xmlns:p="http://schemas.openxmlformats.org/presentationml/2006/main">
+  <p:cSld>
+    <p:spTree>
+      <p:nvGrpSpPr>
+        <p:cNvPr id="1" name=""/>
+        <p:cNvGrpSpPr/>
+        <p:nvPr/>
+      </p:nvGrpSpPr>
+      <p:grpSpPr>
+        <a:xfrm>
+          <a:off x="0" y="0"/>
+          <a:ext cx="0" cy="0"/>
+          <a:chOff x="0" y="0"/>
+          <a:chExt cx="0" cy="0"/>
+        </a:xfrm>
+      </p:grpSpPr>
       <p:sp>
         <p:nvSpPr>
           <p:cNvPr id="4" name="Textfeld 3"/>
@@ -5686,6 +6002,36 @@
           </a:p>
         </p:txBody>
       </p:sp>
+      <p:pic>
+        <p:nvPicPr>
+          <p:cNvPr id="9" name="Grafik 8" descr="Ein Bild, das Text, Schrift, Grafiken, Logo enthält.&#10;&#10;KI-generierte Inhalte können fehlerhaft sein.">
+            <a:extLst>
+              <a:ext uri="{FF2B5EF4-FFF2-40B4-BE49-F238E27FC236}">
+                <a16:creationId xmlns:a16="http://schemas.microsoft.com/office/drawing/2014/main" id="{9B41162D-CE29-8547-8340-88C612442DE7}"/>
+              </a:ext>
+            </a:extLst>
+          </p:cNvPr>
+          <p:cNvPicPr>
+            <a:picLocks noChangeAspect="1"/>
+          </p:cNvPicPr>
+          <p:nvPr/>
+        </p:nvPicPr>
+        <p:blipFill>
+          <a:blip r:embed="rId8"/>
+          <a:stretch>
+            <a:fillRect/>
+          </a:stretch>
+        </p:blipFill>
+        <p:spPr>
+          <a:xfrm>
+            <a:off x="8279411" y="0"/>
+            <a:ext cx="864589" cy="864589"/>
+          </a:xfrm>
+          <a:prstGeom prst="rect">
+            <a:avLst/>
+          </a:prstGeom>
+        </p:spPr>
+      </p:pic>
     </p:spTree>
     <p:extLst>
       <p:ext uri="{BB962C8B-B14F-4D97-AF65-F5344CB8AC3E}">
@@ -5699,7 +6045,7 @@
 </p:sld>
 </file>
 
-<file path=ppt/slides/slide7.xml><?xml version="1.0" encoding="utf-8"?>
+<file path=ppt/slides/slide8.xml><?xml version="1.0" encoding="utf-8"?>
 <p:sld xmlns:a="http://schemas.openxmlformats.org/drawingml/2006/main" xmlns:r="http://schemas.openxmlformats.org/officeDocument/2006/relationships" xmlns:p="http://schemas.openxmlformats.org/presentationml/2006/main">
   <p:cSld>
     <p:spTree>
@@ -6167,7 +6513,7 @@
 </p:sld>
 </file>
 
-<file path=ppt/slides/slide8.xml><?xml version="1.0" encoding="utf-8"?>
+<file path=ppt/slides/slide9.xml><?xml version="1.0" encoding="utf-8"?>
 <p:sld xmlns:a="http://schemas.openxmlformats.org/drawingml/2006/main" xmlns:r="http://schemas.openxmlformats.org/officeDocument/2006/relationships" xmlns:p="http://schemas.openxmlformats.org/presentationml/2006/main">
   <p:cSld>
     <p:spTree>
